--- a/doc/Technikforum/Plakat_Forum.pptx
+++ b/doc/Technikforum/Plakat_Forum.pptx
@@ -107,6 +107,11 @@
       </a:defRPr>
     </a:lvl9pPr>
   </p:defaultTextStyle>
+  <p:extLst>
+    <p:ext uri="{EFAFB233-063F-42B5-8137-9DF3F51BA10A}">
+      <p15:sldGuideLst xmlns:p15="http://schemas.microsoft.com/office/powerpoint/2012/main"/>
+    </p:ext>
+  </p:extLst>
 </p:presentation>
 </file>
 
@@ -237,7 +242,7 @@
           <a:p>
             <a:fld id="{61A61C3E-B578-482D-ADF4-0DD2B122CA35}" type="datetimeFigureOut">
               <a:rPr lang="de-DE" smtClean="0"/>
-              <a:t>18.05.2026</a:t>
+              <a:t>19.05.2026</a:t>
             </a:fld>
             <a:endParaRPr lang="de-DE"/>
           </a:p>
@@ -635,7 +640,7 @@
           <a:p>
             <a:fld id="{7A967564-6120-49BA-AFB2-40F93D1AEBD4}" type="datetimeFigureOut">
               <a:rPr lang="de-DE" smtClean="0"/>
-              <a:t>18.05.2026</a:t>
+              <a:t>19.05.2026</a:t>
             </a:fld>
             <a:endParaRPr lang="de-DE"/>
           </a:p>
@@ -805,7 +810,7 @@
           <a:p>
             <a:fld id="{7A967564-6120-49BA-AFB2-40F93D1AEBD4}" type="datetimeFigureOut">
               <a:rPr lang="de-DE" smtClean="0"/>
-              <a:t>18.05.2026</a:t>
+              <a:t>19.05.2026</a:t>
             </a:fld>
             <a:endParaRPr lang="de-DE"/>
           </a:p>
@@ -985,7 +990,7 @@
           <a:p>
             <a:fld id="{7A967564-6120-49BA-AFB2-40F93D1AEBD4}" type="datetimeFigureOut">
               <a:rPr lang="de-DE" smtClean="0"/>
-              <a:t>18.05.2026</a:t>
+              <a:t>19.05.2026</a:t>
             </a:fld>
             <a:endParaRPr lang="de-DE"/>
           </a:p>
@@ -1155,7 +1160,7 @@
           <a:p>
             <a:fld id="{7A967564-6120-49BA-AFB2-40F93D1AEBD4}" type="datetimeFigureOut">
               <a:rPr lang="de-DE" smtClean="0"/>
-              <a:t>18.05.2026</a:t>
+              <a:t>19.05.2026</a:t>
             </a:fld>
             <a:endParaRPr lang="de-DE"/>
           </a:p>
@@ -1401,7 +1406,7 @@
           <a:p>
             <a:fld id="{7A967564-6120-49BA-AFB2-40F93D1AEBD4}" type="datetimeFigureOut">
               <a:rPr lang="de-DE" smtClean="0"/>
-              <a:t>18.05.2026</a:t>
+              <a:t>19.05.2026</a:t>
             </a:fld>
             <a:endParaRPr lang="de-DE"/>
           </a:p>
@@ -1633,7 +1638,7 @@
           <a:p>
             <a:fld id="{7A967564-6120-49BA-AFB2-40F93D1AEBD4}" type="datetimeFigureOut">
               <a:rPr lang="de-DE" smtClean="0"/>
-              <a:t>18.05.2026</a:t>
+              <a:t>19.05.2026</a:t>
             </a:fld>
             <a:endParaRPr lang="de-DE"/>
           </a:p>
@@ -2000,7 +2005,7 @@
           <a:p>
             <a:fld id="{7A967564-6120-49BA-AFB2-40F93D1AEBD4}" type="datetimeFigureOut">
               <a:rPr lang="de-DE" smtClean="0"/>
-              <a:t>18.05.2026</a:t>
+              <a:t>19.05.2026</a:t>
             </a:fld>
             <a:endParaRPr lang="de-DE"/>
           </a:p>
@@ -2118,7 +2123,7 @@
           <a:p>
             <a:fld id="{7A967564-6120-49BA-AFB2-40F93D1AEBD4}" type="datetimeFigureOut">
               <a:rPr lang="de-DE" smtClean="0"/>
-              <a:t>18.05.2026</a:t>
+              <a:t>19.05.2026</a:t>
             </a:fld>
             <a:endParaRPr lang="de-DE"/>
           </a:p>
@@ -2213,7 +2218,7 @@
           <a:p>
             <a:fld id="{7A967564-6120-49BA-AFB2-40F93D1AEBD4}" type="datetimeFigureOut">
               <a:rPr lang="de-DE" smtClean="0"/>
-              <a:t>18.05.2026</a:t>
+              <a:t>19.05.2026</a:t>
             </a:fld>
             <a:endParaRPr lang="de-DE"/>
           </a:p>
@@ -2490,7 +2495,7 @@
           <a:p>
             <a:fld id="{7A967564-6120-49BA-AFB2-40F93D1AEBD4}" type="datetimeFigureOut">
               <a:rPr lang="de-DE" smtClean="0"/>
-              <a:t>18.05.2026</a:t>
+              <a:t>19.05.2026</a:t>
             </a:fld>
             <a:endParaRPr lang="de-DE"/>
           </a:p>
@@ -2747,7 +2752,7 @@
           <a:p>
             <a:fld id="{7A967564-6120-49BA-AFB2-40F93D1AEBD4}" type="datetimeFigureOut">
               <a:rPr lang="de-DE" smtClean="0"/>
-              <a:t>18.05.2026</a:t>
+              <a:t>19.05.2026</a:t>
             </a:fld>
             <a:endParaRPr lang="de-DE"/>
           </a:p>
@@ -2960,7 +2965,7 @@
           <a:p>
             <a:fld id="{7A967564-6120-49BA-AFB2-40F93D1AEBD4}" type="datetimeFigureOut">
               <a:rPr lang="de-DE" smtClean="0"/>
-              <a:t>18.05.2026</a:t>
+              <a:t>19.05.2026</a:t>
             </a:fld>
             <a:endParaRPr lang="de-DE"/>
           </a:p>
@@ -3865,12 +3870,8 @@
           <a:lstStyle/>
           <a:p>
             <a:r>
-              <a:rPr lang="de-DE" sz="2260" b="1" dirty="0" err="1"/>
-              <a:t>BézierkurveParametrische</a:t>
-            </a:r>
-            <a:r>
               <a:rPr lang="de-DE" sz="2260" b="1" dirty="0"/>
-              <a:t> </a:t>
+              <a:t>Bézierkurve Parametrische </a:t>
             </a:r>
           </a:p>
           <a:p>
@@ -4398,6 +4399,436 @@
           </a:p>
         </p:txBody>
       </p:sp>
+      <p:sp>
+        <p:nvSpPr>
+          <p:cNvPr id="6" name="Textfeld 5">
+            <a:extLst>
+              <a:ext uri="{FF2B5EF4-FFF2-40B4-BE49-F238E27FC236}">
+                <a16:creationId xmlns:a16="http://schemas.microsoft.com/office/drawing/2014/main" id="{ED171B0D-BEA3-3447-F325-D6980DEC0ECF}"/>
+              </a:ext>
+            </a:extLst>
+          </p:cNvPr>
+          <p:cNvSpPr txBox="1"/>
+          <p:nvPr/>
+        </p:nvSpPr>
+        <p:spPr>
+          <a:xfrm>
+            <a:off x="10420247" y="3067986"/>
+            <a:ext cx="10773506" cy="2179058"/>
+          </a:xfrm>
+          <a:prstGeom prst="rect">
+            <a:avLst/>
+          </a:prstGeom>
+          <a:noFill/>
+        </p:spPr>
+        <p:txBody>
+          <a:bodyPr wrap="square">
+            <a:spAutoFit/>
+          </a:bodyPr>
+          <a:lstStyle/>
+          <a:p>
+            <a:r>
+              <a:rPr lang="de-DE" sz="2260" b="1" dirty="0"/>
+              <a:t>System-Optimierung</a:t>
+            </a:r>
+          </a:p>
+          <a:p>
+            <a:pPr marL="342900" indent="-342900">
+              <a:buFont typeface="Arial" panose="020B0604020202020204" pitchFamily="34" charset="0"/>
+              <a:buChar char="•"/>
+            </a:pPr>
+            <a:r>
+              <a:rPr lang="de-DE" sz="2260" dirty="0"/>
+              <a:t>Wechsel von Ubuntu Desktop zu Ubuntu Server</a:t>
+            </a:r>
+          </a:p>
+          <a:p>
+            <a:pPr marL="342900" indent="-342900">
+              <a:buFont typeface="Arial" panose="020B0604020202020204" pitchFamily="34" charset="0"/>
+              <a:buChar char="•"/>
+            </a:pPr>
+            <a:r>
+              <a:rPr lang="de-DE" sz="2260" dirty="0"/>
+              <a:t>Speicherauslastung (16GB SSD): 100% -&gt; ~25%</a:t>
+            </a:r>
+          </a:p>
+          <a:p>
+            <a:pPr marL="342900" indent="-342900">
+              <a:buFont typeface="Arial" panose="020B0604020202020204" pitchFamily="34" charset="0"/>
+              <a:buChar char="•"/>
+            </a:pPr>
+            <a:r>
+              <a:rPr lang="de-DE" sz="2260" dirty="0"/>
+              <a:t>CPU-Auslastung: ~90%  (ohne aktivem LiDAR) -&gt; ~50% (mit aktivem LiDAR)</a:t>
+            </a:r>
+          </a:p>
+          <a:p>
+            <a:pPr marL="342900" indent="-342900">
+              <a:buFont typeface="Arial" panose="020B0604020202020204" pitchFamily="34" charset="0"/>
+              <a:buChar char="•"/>
+            </a:pPr>
+            <a:r>
+              <a:rPr lang="de-DE" sz="2260" dirty="0"/>
+              <a:t>Durch das Entfernen der UI des Raspberry </a:t>
+            </a:r>
+            <a:r>
+              <a:rPr lang="de-DE" sz="2260" dirty="0" err="1"/>
+              <a:t>Pi‘s</a:t>
+            </a:r>
+            <a:r>
+              <a:rPr lang="de-DE" sz="2260" dirty="0"/>
+              <a:t> werden dringend benötigte Ressourcen frei</a:t>
+            </a:r>
+          </a:p>
+        </p:txBody>
+      </p:sp>
+      <p:sp>
+        <p:nvSpPr>
+          <p:cNvPr id="13" name="Textfeld 12">
+            <a:extLst>
+              <a:ext uri="{FF2B5EF4-FFF2-40B4-BE49-F238E27FC236}">
+                <a16:creationId xmlns:a16="http://schemas.microsoft.com/office/drawing/2014/main" id="{E9E4120F-2570-6A77-8123-F0466D59CFD1}"/>
+              </a:ext>
+            </a:extLst>
+          </p:cNvPr>
+          <p:cNvSpPr txBox="1"/>
+          <p:nvPr/>
+        </p:nvSpPr>
+        <p:spPr>
+          <a:xfrm>
+            <a:off x="10420247" y="5689973"/>
+            <a:ext cx="10773506" cy="1831271"/>
+          </a:xfrm>
+          <a:prstGeom prst="rect">
+            <a:avLst/>
+          </a:prstGeom>
+          <a:noFill/>
+        </p:spPr>
+        <p:txBody>
+          <a:bodyPr wrap="square">
+            <a:spAutoFit/>
+          </a:bodyPr>
+          <a:lstStyle/>
+          <a:p>
+            <a:r>
+              <a:rPr lang="de-DE" sz="2260" b="1" dirty="0"/>
+              <a:t>Software &amp; Architektur</a:t>
+            </a:r>
+          </a:p>
+          <a:p>
+            <a:pPr marL="342900" indent="-342900">
+              <a:buFont typeface="Arial" panose="020B0604020202020204" pitchFamily="34" charset="0"/>
+              <a:buChar char="•"/>
+            </a:pPr>
+            <a:r>
+              <a:rPr lang="de-DE" sz="2260" dirty="0"/>
+              <a:t>In Ubuntu Server werden keine GPIO Libraries automatisch mitgeliefert, folglich verwenden wir die modernere Architektur</a:t>
+            </a:r>
+          </a:p>
+          <a:p>
+            <a:pPr marL="342900" indent="-342900">
+              <a:buFont typeface="Arial" panose="020B0604020202020204" pitchFamily="34" charset="0"/>
+              <a:buChar char="•"/>
+            </a:pPr>
+            <a:r>
+              <a:rPr lang="de-DE" sz="2260" dirty="0"/>
+              <a:t>Umstellung veralteter GPIO Bibliothek zu </a:t>
+            </a:r>
+            <a:r>
+              <a:rPr lang="de-DE" sz="2260" dirty="0" err="1"/>
+              <a:t>LibGPIOD</a:t>
+            </a:r>
+            <a:endParaRPr lang="de-DE" sz="2260" dirty="0"/>
+          </a:p>
+          <a:p>
+            <a:pPr marL="342900" indent="-342900">
+              <a:buFont typeface="Arial" panose="020B0604020202020204" pitchFamily="34" charset="0"/>
+              <a:buChar char="•"/>
+            </a:pPr>
+            <a:r>
+              <a:rPr lang="de-DE" sz="2260" dirty="0"/>
+              <a:t>Neue Stromverbindungen verhindern Kabelbruch der Batterieverbindung</a:t>
+            </a:r>
+          </a:p>
+        </p:txBody>
+      </p:sp>
+      <p:sp>
+        <p:nvSpPr>
+          <p:cNvPr id="14" name="Textfeld 13">
+            <a:extLst>
+              <a:ext uri="{FF2B5EF4-FFF2-40B4-BE49-F238E27FC236}">
+                <a16:creationId xmlns:a16="http://schemas.microsoft.com/office/drawing/2014/main" id="{D446D99F-A928-1DCE-3F05-A0732C36BB09}"/>
+              </a:ext>
+            </a:extLst>
+          </p:cNvPr>
+          <p:cNvSpPr txBox="1"/>
+          <p:nvPr/>
+        </p:nvSpPr>
+        <p:spPr>
+          <a:xfrm>
+            <a:off x="10420247" y="10216527"/>
+            <a:ext cx="10773506" cy="1483483"/>
+          </a:xfrm>
+          <a:prstGeom prst="rect">
+            <a:avLst/>
+          </a:prstGeom>
+          <a:noFill/>
+        </p:spPr>
+        <p:txBody>
+          <a:bodyPr wrap="square">
+            <a:spAutoFit/>
+          </a:bodyPr>
+          <a:lstStyle/>
+          <a:p>
+            <a:r>
+              <a:rPr lang="de-DE" sz="2260" b="1" dirty="0"/>
+              <a:t>Ergebnis</a:t>
+            </a:r>
+          </a:p>
+          <a:p>
+            <a:pPr marL="342900" indent="-342900">
+              <a:buFont typeface="Arial" panose="020B0604020202020204" pitchFamily="34" charset="0"/>
+              <a:buChar char="•"/>
+            </a:pPr>
+            <a:r>
+              <a:rPr lang="de-DE" sz="2260" dirty="0"/>
+              <a:t>Deutlich mehr verfügbare Rechen- und Speicherressourcen</a:t>
+            </a:r>
+          </a:p>
+          <a:p>
+            <a:pPr marL="342900" indent="-342900">
+              <a:buFont typeface="Arial" panose="020B0604020202020204" pitchFamily="34" charset="0"/>
+              <a:buChar char="•"/>
+            </a:pPr>
+            <a:r>
+              <a:rPr lang="de-DE" sz="2260" dirty="0"/>
+              <a:t>Stabiler Betrieb</a:t>
+            </a:r>
+          </a:p>
+          <a:p>
+            <a:pPr marL="342900" indent="-342900">
+              <a:buFont typeface="Arial" panose="020B0604020202020204" pitchFamily="34" charset="0"/>
+              <a:buChar char="•"/>
+            </a:pPr>
+            <a:r>
+              <a:rPr lang="de-DE" sz="2260" dirty="0"/>
+              <a:t>Reproduzierbares Setup</a:t>
+            </a:r>
+          </a:p>
+        </p:txBody>
+      </p:sp>
+      <p:sp>
+        <p:nvSpPr>
+          <p:cNvPr id="15" name="Textfeld 14">
+            <a:extLst>
+              <a:ext uri="{FF2B5EF4-FFF2-40B4-BE49-F238E27FC236}">
+                <a16:creationId xmlns:a16="http://schemas.microsoft.com/office/drawing/2014/main" id="{086ED35E-4918-5F3D-1734-61774D35E7C5}"/>
+              </a:ext>
+            </a:extLst>
+          </p:cNvPr>
+          <p:cNvSpPr txBox="1"/>
+          <p:nvPr/>
+        </p:nvSpPr>
+        <p:spPr>
+          <a:xfrm>
+            <a:off x="10420247" y="7953250"/>
+            <a:ext cx="10773506" cy="1831271"/>
+          </a:xfrm>
+          <a:prstGeom prst="rect">
+            <a:avLst/>
+          </a:prstGeom>
+          <a:noFill/>
+        </p:spPr>
+        <p:txBody>
+          <a:bodyPr wrap="square">
+            <a:spAutoFit/>
+          </a:bodyPr>
+          <a:lstStyle/>
+          <a:p>
+            <a:r>
+              <a:rPr lang="de-DE" sz="2260" b="1" dirty="0" err="1"/>
+              <a:t>Deployment</a:t>
+            </a:r>
+            <a:r>
+              <a:rPr lang="de-DE" sz="2260" b="1" dirty="0"/>
+              <a:t> &amp; Automatisierung</a:t>
+            </a:r>
+          </a:p>
+          <a:p>
+            <a:pPr marL="342900" indent="-342900">
+              <a:buFont typeface="Arial" panose="020B0604020202020204" pitchFamily="34" charset="0"/>
+              <a:buChar char="•"/>
+            </a:pPr>
+            <a:r>
+              <a:rPr lang="de-DE" sz="2260" dirty="0"/>
+              <a:t>Bash-Skript für OS-Setup</a:t>
+            </a:r>
+          </a:p>
+          <a:p>
+            <a:pPr marL="342900" indent="-342900">
+              <a:buFont typeface="Arial" panose="020B0604020202020204" pitchFamily="34" charset="0"/>
+              <a:buChar char="•"/>
+            </a:pPr>
+            <a:r>
+              <a:rPr lang="de-DE" sz="2260" dirty="0"/>
+              <a:t>Ready-</a:t>
+            </a:r>
+            <a:r>
+              <a:rPr lang="de-DE" sz="2260" dirty="0" err="1"/>
+              <a:t>to</a:t>
+            </a:r>
+            <a:r>
+              <a:rPr lang="de-DE" sz="2260" dirty="0"/>
+              <a:t>-run Docker Image ohne </a:t>
+            </a:r>
+            <a:r>
+              <a:rPr lang="de-DE" sz="2260" dirty="0" err="1"/>
+              <a:t>Install</a:t>
+            </a:r>
+            <a:r>
+              <a:rPr lang="de-DE" sz="2260" dirty="0"/>
+              <a:t>-Befehle innerhalb </a:t>
+            </a:r>
+          </a:p>
+          <a:p>
+            <a:pPr marL="342900" indent="-342900">
+              <a:buFont typeface="Arial" panose="020B0604020202020204" pitchFamily="34" charset="0"/>
+              <a:buChar char="•"/>
+            </a:pPr>
+            <a:r>
+              <a:rPr lang="de-DE" sz="2260" dirty="0"/>
+              <a:t>Nach RPI-Boot ist das komplette System Einsatzbereit ohne Menschliche Interaktion</a:t>
+            </a:r>
+          </a:p>
+        </p:txBody>
+      </p:sp>
+      <p:sp>
+        <p:nvSpPr>
+          <p:cNvPr id="18" name="Textfeld 17">
+            <a:extLst>
+              <a:ext uri="{FF2B5EF4-FFF2-40B4-BE49-F238E27FC236}">
+                <a16:creationId xmlns:a16="http://schemas.microsoft.com/office/drawing/2014/main" id="{399B1778-5EBA-834F-8155-C2EED25CEF9D}"/>
+              </a:ext>
+            </a:extLst>
+          </p:cNvPr>
+          <p:cNvSpPr txBox="1"/>
+          <p:nvPr/>
+        </p:nvSpPr>
+        <p:spPr>
+          <a:xfrm>
+            <a:off x="10420247" y="1928451"/>
+            <a:ext cx="9614367" cy="1048877"/>
+          </a:xfrm>
+          <a:prstGeom prst="rect">
+            <a:avLst/>
+          </a:prstGeom>
+          <a:noFill/>
+        </p:spPr>
+        <p:txBody>
+          <a:bodyPr wrap="square" rtlCol="0">
+            <a:spAutoFit/>
+          </a:bodyPr>
+          <a:lstStyle/>
+          <a:p>
+            <a:r>
+              <a:rPr lang="de-DE" sz="3108" dirty="0"/>
+              <a:t>Verbesserte Systemarchitektur, Reproduzierbares Setup </a:t>
+            </a:r>
+            <a:r>
+              <a:rPr lang="de-DE" sz="3108"/>
+              <a:t>und </a:t>
+            </a:r>
+            <a:r>
+              <a:rPr lang="de-DE" sz="3108" dirty="0"/>
+              <a:t>M</a:t>
+            </a:r>
+            <a:r>
+              <a:rPr lang="de-DE" sz="3108"/>
+              <a:t>odernisierung </a:t>
+            </a:r>
+            <a:r>
+              <a:rPr lang="de-DE" sz="3108" dirty="0"/>
+              <a:t>der Technik</a:t>
+            </a:r>
+          </a:p>
+        </p:txBody>
+      </p:sp>
+      <p:cxnSp>
+        <p:nvCxnSpPr>
+          <p:cNvPr id="37" name="Gerader Verbinder 36">
+            <a:extLst>
+              <a:ext uri="{FF2B5EF4-FFF2-40B4-BE49-F238E27FC236}">
+                <a16:creationId xmlns:a16="http://schemas.microsoft.com/office/drawing/2014/main" id="{100A4BCF-A974-0CAC-4282-9C026C72E2E4}"/>
+              </a:ext>
+            </a:extLst>
+          </p:cNvPr>
+          <p:cNvCxnSpPr>
+            <a:cxnSpLocks/>
+          </p:cNvCxnSpPr>
+          <p:nvPr/>
+        </p:nvCxnSpPr>
+        <p:spPr>
+          <a:xfrm>
+            <a:off x="10183153" y="1780023"/>
+            <a:ext cx="11200472" cy="0"/>
+          </a:xfrm>
+          <a:prstGeom prst="line">
+            <a:avLst/>
+          </a:prstGeom>
+        </p:spPr>
+        <p:style>
+          <a:lnRef idx="2">
+            <a:schemeClr val="accent1"/>
+          </a:lnRef>
+          <a:fillRef idx="0">
+            <a:schemeClr val="accent1"/>
+          </a:fillRef>
+          <a:effectRef idx="1">
+            <a:schemeClr val="accent1"/>
+          </a:effectRef>
+          <a:fontRef idx="minor">
+            <a:schemeClr val="tx1"/>
+          </a:fontRef>
+        </p:style>
+      </p:cxnSp>
+      <p:cxnSp>
+        <p:nvCxnSpPr>
+          <p:cNvPr id="39" name="Gerader Verbinder 38">
+            <a:extLst>
+              <a:ext uri="{FF2B5EF4-FFF2-40B4-BE49-F238E27FC236}">
+                <a16:creationId xmlns:a16="http://schemas.microsoft.com/office/drawing/2014/main" id="{A7AEA1AD-5F64-81A6-0778-181BA7081140}"/>
+              </a:ext>
+            </a:extLst>
+          </p:cNvPr>
+          <p:cNvCxnSpPr>
+            <a:cxnSpLocks/>
+          </p:cNvCxnSpPr>
+          <p:nvPr/>
+        </p:nvCxnSpPr>
+        <p:spPr>
+          <a:xfrm>
+            <a:off x="10155514" y="12052056"/>
+            <a:ext cx="11200472" cy="0"/>
+          </a:xfrm>
+          <a:prstGeom prst="line">
+            <a:avLst/>
+          </a:prstGeom>
+        </p:spPr>
+        <p:style>
+          <a:lnRef idx="2">
+            <a:schemeClr val="accent1"/>
+          </a:lnRef>
+          <a:fillRef idx="0">
+            <a:schemeClr val="accent1"/>
+          </a:fillRef>
+          <a:effectRef idx="1">
+            <a:schemeClr val="accent1"/>
+          </a:effectRef>
+          <a:fontRef idx="minor">
+            <a:schemeClr val="tx1"/>
+          </a:fontRef>
+        </p:style>
+      </p:cxnSp>
     </p:spTree>
     <p:extLst>
       <p:ext uri="{BB962C8B-B14F-4D97-AF65-F5344CB8AC3E}">

--- a/doc/Technikforum/Plakat_Forum.pptx
+++ b/doc/Technikforum/Plakat_Forum.pptx
@@ -118,7 +118,7 @@
 <file path=ppt/revisionInfo.xml><?xml version="1.0" encoding="utf-8"?>
 <p1510:revInfo xmlns:a="http://schemas.openxmlformats.org/drawingml/2006/main" xmlns:r="http://schemas.openxmlformats.org/officeDocument/2006/relationships" xmlns:p1510="http://schemas.microsoft.com/office/powerpoint/2015/10/main">
   <p1510:revLst>
-    <p1510:client id="{974C6F5C-8394-499A-B74A-2887A4D69D20}" v="2" dt="2026-05-18T13:12:28.528"/>
+    <p1510:client id="{974C6F5C-8394-499A-B74A-2887A4D69D20}" v="19" dt="2026-05-20T13:04:01.743"/>
   </p1510:revLst>
 </p1510:revInfo>
 </file>
@@ -127,19 +127,155 @@
 <pc:chgInfo xmlns:a="http://schemas.openxmlformats.org/drawingml/2006/main" xmlns:r="http://schemas.openxmlformats.org/officeDocument/2006/relationships" xmlns:ac="http://schemas.microsoft.com/office/drawing/2013/main/command" xmlns:pc="http://schemas.microsoft.com/office/powerpoint/2013/main/command">
   <pc:docChgLst>
     <pc:chgData name="Maurer, Marius" userId="73e198c0-4891-41c9-a475-1c219e411f9f" providerId="ADAL" clId="{B2A80625-E86A-4CEB-9035-CBD35C99A22C}"/>
-    <pc:docChg chg="undo custSel modSld">
-      <pc:chgData name="Maurer, Marius" userId="73e198c0-4891-41c9-a475-1c219e411f9f" providerId="ADAL" clId="{B2A80625-E86A-4CEB-9035-CBD35C99A22C}" dt="2026-05-18T13:14:14.578" v="34" actId="33524"/>
+    <pc:docChg chg="undo redo custSel modSld">
+      <pc:chgData name="Maurer, Marius" userId="73e198c0-4891-41c9-a475-1c219e411f9f" providerId="ADAL" clId="{B2A80625-E86A-4CEB-9035-CBD35C99A22C}" dt="2026-05-20T13:06:02.175" v="1536" actId="313"/>
       <pc:docMkLst>
         <pc:docMk/>
       </pc:docMkLst>
-      <pc:sldChg chg="addSp modSp mod">
-        <pc:chgData name="Maurer, Marius" userId="73e198c0-4891-41c9-a475-1c219e411f9f" providerId="ADAL" clId="{B2A80625-E86A-4CEB-9035-CBD35C99A22C}" dt="2026-05-18T13:14:14.578" v="34" actId="33524"/>
+      <pc:sldChg chg="addSp delSp modSp mod">
+        <pc:chgData name="Maurer, Marius" userId="73e198c0-4891-41c9-a475-1c219e411f9f" providerId="ADAL" clId="{B2A80625-E86A-4CEB-9035-CBD35C99A22C}" dt="2026-05-20T13:06:02.175" v="1536" actId="313"/>
         <pc:sldMkLst>
           <pc:docMk/>
           <pc:sldMk cId="332124325" sldId="256"/>
         </pc:sldMkLst>
+        <pc:spChg chg="add">
+          <ac:chgData name="Maurer, Marius" userId="73e198c0-4891-41c9-a475-1c219e411f9f" providerId="ADAL" clId="{B2A80625-E86A-4CEB-9035-CBD35C99A22C}" dt="2026-05-20T12:34:23.193" v="35"/>
+          <ac:spMkLst>
+            <pc:docMk/>
+            <pc:sldMk cId="332124325" sldId="256"/>
+            <ac:spMk id="2" creationId="{88148F0E-DD65-C993-6820-95AD485A39DC}"/>
+          </ac:spMkLst>
+        </pc:spChg>
         <pc:spChg chg="mod">
-          <ac:chgData name="Maurer, Marius" userId="73e198c0-4891-41c9-a475-1c219e411f9f" providerId="ADAL" clId="{B2A80625-E86A-4CEB-9035-CBD35C99A22C}" dt="2026-05-18T13:14:14.578" v="34" actId="33524"/>
+          <ac:chgData name="Maurer, Marius" userId="73e198c0-4891-41c9-a475-1c219e411f9f" providerId="ADAL" clId="{B2A80625-E86A-4CEB-9035-CBD35C99A22C}" dt="2026-05-20T12:37:38.559" v="107" actId="20577"/>
+          <ac:spMkLst>
+            <pc:docMk/>
+            <pc:sldMk cId="332124325" sldId="256"/>
+            <ac:spMk id="6" creationId="{ED171B0D-BEA3-3447-F325-D6980DEC0ECF}"/>
+          </ac:spMkLst>
+        </pc:spChg>
+        <pc:spChg chg="add mod">
+          <ac:chgData name="Maurer, Marius" userId="73e198c0-4891-41c9-a475-1c219e411f9f" providerId="ADAL" clId="{B2A80625-E86A-4CEB-9035-CBD35C99A22C}" dt="2026-05-20T12:48:44.406" v="565" actId="948"/>
+          <ac:spMkLst>
+            <pc:docMk/>
+            <pc:sldMk cId="332124325" sldId="256"/>
+            <ac:spMk id="8" creationId="{7054B9CF-28EC-B7AF-93FA-6A8E664F6A27}"/>
+          </ac:spMkLst>
+        </pc:spChg>
+        <pc:spChg chg="add mod">
+          <ac:chgData name="Maurer, Marius" userId="73e198c0-4891-41c9-a475-1c219e411f9f" providerId="ADAL" clId="{B2A80625-E86A-4CEB-9035-CBD35C99A22C}" dt="2026-05-20T12:55:02.150" v="794" actId="255"/>
+          <ac:spMkLst>
+            <pc:docMk/>
+            <pc:sldMk cId="332124325" sldId="256"/>
+            <ac:spMk id="10" creationId="{801A9B5C-99C7-1C82-552E-1A587087C116}"/>
+          </ac:spMkLst>
+        </pc:spChg>
+        <pc:spChg chg="mod">
+          <ac:chgData name="Maurer, Marius" userId="73e198c0-4891-41c9-a475-1c219e411f9f" providerId="ADAL" clId="{B2A80625-E86A-4CEB-9035-CBD35C99A22C}" dt="2026-05-20T12:38:40.958" v="145" actId="20577"/>
+          <ac:spMkLst>
+            <pc:docMk/>
+            <pc:sldMk cId="332124325" sldId="256"/>
+            <ac:spMk id="13" creationId="{E9E4120F-2570-6A77-8123-F0466D59CFD1}"/>
+          </ac:spMkLst>
+        </pc:spChg>
+        <pc:spChg chg="mod">
+          <ac:chgData name="Maurer, Marius" userId="73e198c0-4891-41c9-a475-1c219e411f9f" providerId="ADAL" clId="{B2A80625-E86A-4CEB-9035-CBD35C99A22C}" dt="2026-05-20T12:57:14.089" v="1058" actId="1035"/>
+          <ac:spMkLst>
+            <pc:docMk/>
+            <pc:sldMk cId="332124325" sldId="256"/>
+            <ac:spMk id="16" creationId="{0B2BAB8E-709F-9762-DD3A-F6CB0BB3F97A}"/>
+          </ac:spMkLst>
+        </pc:spChg>
+        <pc:spChg chg="add mod">
+          <ac:chgData name="Maurer, Marius" userId="73e198c0-4891-41c9-a475-1c219e411f9f" providerId="ADAL" clId="{B2A80625-E86A-4CEB-9035-CBD35C99A22C}" dt="2026-05-20T12:56:14.062" v="975" actId="1035"/>
+          <ac:spMkLst>
+            <pc:docMk/>
+            <pc:sldMk cId="332124325" sldId="256"/>
+            <ac:spMk id="19" creationId="{07CDD146-FA05-911F-C7F2-8CD0264BAAF5}"/>
+          </ac:spMkLst>
+        </pc:spChg>
+        <pc:spChg chg="add mod">
+          <ac:chgData name="Maurer, Marius" userId="73e198c0-4891-41c9-a475-1c219e411f9f" providerId="ADAL" clId="{B2A80625-E86A-4CEB-9035-CBD35C99A22C}" dt="2026-05-20T12:56:14.062" v="975" actId="1035"/>
+          <ac:spMkLst>
+            <pc:docMk/>
+            <pc:sldMk cId="332124325" sldId="256"/>
+            <ac:spMk id="20" creationId="{81FAA57B-3CFA-CA3C-60E5-E182BE3915AD}"/>
+          </ac:spMkLst>
+        </pc:spChg>
+        <pc:spChg chg="mod">
+          <ac:chgData name="Maurer, Marius" userId="73e198c0-4891-41c9-a475-1c219e411f9f" providerId="ADAL" clId="{B2A80625-E86A-4CEB-9035-CBD35C99A22C}" dt="2026-05-20T12:57:14.089" v="1058" actId="1035"/>
+          <ac:spMkLst>
+            <pc:docMk/>
+            <pc:sldMk cId="332124325" sldId="256"/>
+            <ac:spMk id="22" creationId="{C7101EAF-6A18-967A-24E7-520D3D833336}"/>
+          </ac:spMkLst>
+        </pc:spChg>
+        <pc:spChg chg="mod">
+          <ac:chgData name="Maurer, Marius" userId="73e198c0-4891-41c9-a475-1c219e411f9f" providerId="ADAL" clId="{B2A80625-E86A-4CEB-9035-CBD35C99A22C}" dt="2026-05-20T12:57:14.089" v="1058" actId="1035"/>
+          <ac:spMkLst>
+            <pc:docMk/>
+            <pc:sldMk cId="332124325" sldId="256"/>
+            <ac:spMk id="23" creationId="{A393426E-AB19-B36C-B8F5-93EAC23E8A6E}"/>
+          </ac:spMkLst>
+        </pc:spChg>
+        <pc:spChg chg="mod">
+          <ac:chgData name="Maurer, Marius" userId="73e198c0-4891-41c9-a475-1c219e411f9f" providerId="ADAL" clId="{B2A80625-E86A-4CEB-9035-CBD35C99A22C}" dt="2026-05-20T12:57:14.089" v="1058" actId="1035"/>
+          <ac:spMkLst>
+            <pc:docMk/>
+            <pc:sldMk cId="332124325" sldId="256"/>
+            <ac:spMk id="24" creationId="{DC21C7F8-A4EF-125E-EDBA-1944ADCD3CE6}"/>
+          </ac:spMkLst>
+        </pc:spChg>
+        <pc:spChg chg="mod">
+          <ac:chgData name="Maurer, Marius" userId="73e198c0-4891-41c9-a475-1c219e411f9f" providerId="ADAL" clId="{B2A80625-E86A-4CEB-9035-CBD35C99A22C}" dt="2026-05-20T12:57:14.089" v="1058" actId="1035"/>
+          <ac:spMkLst>
+            <pc:docMk/>
+            <pc:sldMk cId="332124325" sldId="256"/>
+            <ac:spMk id="25" creationId="{DDD33276-5387-D0B6-2708-69F5979438A6}"/>
+          </ac:spMkLst>
+        </pc:spChg>
+        <pc:spChg chg="add del mod">
+          <ac:chgData name="Maurer, Marius" userId="73e198c0-4891-41c9-a475-1c219e411f9f" providerId="ADAL" clId="{B2A80625-E86A-4CEB-9035-CBD35C99A22C}" dt="2026-05-20T12:54:00.112" v="754" actId="21"/>
+          <ac:spMkLst>
+            <pc:docMk/>
+            <pc:sldMk cId="332124325" sldId="256"/>
+            <ac:spMk id="26" creationId="{917C5E8A-2A2B-D32C-B9F0-08104425E5AD}"/>
+          </ac:spMkLst>
+        </pc:spChg>
+        <pc:spChg chg="add del mod">
+          <ac:chgData name="Maurer, Marius" userId="73e198c0-4891-41c9-a475-1c219e411f9f" providerId="ADAL" clId="{B2A80625-E86A-4CEB-9035-CBD35C99A22C}" dt="2026-05-20T12:54:00.112" v="754" actId="21"/>
+          <ac:spMkLst>
+            <pc:docMk/>
+            <pc:sldMk cId="332124325" sldId="256"/>
+            <ac:spMk id="28" creationId="{2F44354E-5EB2-E857-B06E-95197509A6A2}"/>
+          </ac:spMkLst>
+        </pc:spChg>
+        <pc:spChg chg="add mod">
+          <ac:chgData name="Maurer, Marius" userId="73e198c0-4891-41c9-a475-1c219e411f9f" providerId="ADAL" clId="{B2A80625-E86A-4CEB-9035-CBD35C99A22C}" dt="2026-05-20T12:59:13.775" v="1319" actId="255"/>
+          <ac:spMkLst>
+            <pc:docMk/>
+            <pc:sldMk cId="332124325" sldId="256"/>
+            <ac:spMk id="30" creationId="{D621C955-9D7E-6371-7B4B-D393D8713C7E}"/>
+          </ac:spMkLst>
+        </pc:spChg>
+        <pc:spChg chg="add mod">
+          <ac:chgData name="Maurer, Marius" userId="73e198c0-4891-41c9-a475-1c219e411f9f" providerId="ADAL" clId="{B2A80625-E86A-4CEB-9035-CBD35C99A22C}" dt="2026-05-20T13:06:02.175" v="1536" actId="313"/>
+          <ac:spMkLst>
+            <pc:docMk/>
+            <pc:sldMk cId="332124325" sldId="256"/>
+            <ac:spMk id="33" creationId="{22CAC9EC-4426-86E6-AA5F-1B3058572100}"/>
+          </ac:spMkLst>
+        </pc:spChg>
+        <pc:spChg chg="mod">
+          <ac:chgData name="Maurer, Marius" userId="73e198c0-4891-41c9-a475-1c219e411f9f" providerId="ADAL" clId="{B2A80625-E86A-4CEB-9035-CBD35C99A22C}" dt="2026-05-20T12:55:23.989" v="846" actId="1036"/>
+          <ac:spMkLst>
+            <pc:docMk/>
+            <pc:sldMk cId="332124325" sldId="256"/>
+            <ac:spMk id="45" creationId="{B2C63307-CC6A-0E28-3554-70881463BC44}"/>
+          </ac:spMkLst>
+        </pc:spChg>
+        <pc:spChg chg="mod">
+          <ac:chgData name="Maurer, Marius" userId="73e198c0-4891-41c9-a475-1c219e411f9f" providerId="ADAL" clId="{B2A80625-E86A-4CEB-9035-CBD35C99A22C}" dt="2026-05-20T12:55:23.989" v="846" actId="1036"/>
           <ac:spMkLst>
             <pc:docMk/>
             <pc:sldMk cId="332124325" sldId="256"/>
@@ -154,6 +290,118 @@
             <ac:spMk id="49" creationId="{C4859A16-0F7A-2917-7B0B-9FA00200A40C}"/>
           </ac:spMkLst>
         </pc:spChg>
+        <pc:picChg chg="add mod ord modCrop">
+          <ac:chgData name="Maurer, Marius" userId="73e198c0-4891-41c9-a475-1c219e411f9f" providerId="ADAL" clId="{B2A80625-E86A-4CEB-9035-CBD35C99A22C}" dt="2026-05-20T12:56:57.431" v="1023" actId="1076"/>
+          <ac:picMkLst>
+            <pc:docMk/>
+            <pc:sldMk cId="332124325" sldId="256"/>
+            <ac:picMk id="3" creationId="{1A99C2FA-F900-4667-35AC-3234A9BE34C7}"/>
+          </ac:picMkLst>
+        </pc:picChg>
+        <pc:picChg chg="mod">
+          <ac:chgData name="Maurer, Marius" userId="73e198c0-4891-41c9-a475-1c219e411f9f" providerId="ADAL" clId="{B2A80625-E86A-4CEB-9035-CBD35C99A22C}" dt="2026-05-20T12:57:14.089" v="1058" actId="1035"/>
+          <ac:picMkLst>
+            <pc:docMk/>
+            <pc:sldMk cId="332124325" sldId="256"/>
+            <ac:picMk id="5" creationId="{AE78F287-B35B-340A-FB9E-F3C1C9206AAD}"/>
+          </ac:picMkLst>
+        </pc:picChg>
+        <pc:picChg chg="mod">
+          <ac:chgData name="Maurer, Marius" userId="73e198c0-4891-41c9-a475-1c219e411f9f" providerId="ADAL" clId="{B2A80625-E86A-4CEB-9035-CBD35C99A22C}" dt="2026-05-20T12:57:14.089" v="1058" actId="1035"/>
+          <ac:picMkLst>
+            <pc:docMk/>
+            <pc:sldMk cId="332124325" sldId="256"/>
+            <ac:picMk id="7" creationId="{436412D9-10B4-A546-49F9-C359918E57C6}"/>
+          </ac:picMkLst>
+        </pc:picChg>
+        <pc:picChg chg="mod">
+          <ac:chgData name="Maurer, Marius" userId="73e198c0-4891-41c9-a475-1c219e411f9f" providerId="ADAL" clId="{B2A80625-E86A-4CEB-9035-CBD35C99A22C}" dt="2026-05-20T12:57:14.089" v="1058" actId="1035"/>
+          <ac:picMkLst>
+            <pc:docMk/>
+            <pc:sldMk cId="332124325" sldId="256"/>
+            <ac:picMk id="9" creationId="{2EE2B6D6-CA77-5E86-0D2F-37D3A2A72A6D}"/>
+          </ac:picMkLst>
+        </pc:picChg>
+        <pc:picChg chg="add del mod">
+          <ac:chgData name="Maurer, Marius" userId="73e198c0-4891-41c9-a475-1c219e411f9f" providerId="ADAL" clId="{B2A80625-E86A-4CEB-9035-CBD35C99A22C}" dt="2026-05-20T12:54:00.112" v="754" actId="21"/>
+          <ac:picMkLst>
+            <pc:docMk/>
+            <pc:sldMk cId="332124325" sldId="256"/>
+            <ac:picMk id="21" creationId="{B72B61E1-1E4C-815D-3BA7-20654E73E5FB}"/>
+          </ac:picMkLst>
+        </pc:picChg>
+        <pc:picChg chg="mod">
+          <ac:chgData name="Maurer, Marius" userId="73e198c0-4891-41c9-a475-1c219e411f9f" providerId="ADAL" clId="{B2A80625-E86A-4CEB-9035-CBD35C99A22C}" dt="2026-05-20T12:57:14.089" v="1058" actId="1035"/>
+          <ac:picMkLst>
+            <pc:docMk/>
+            <pc:sldMk cId="332124325" sldId="256"/>
+            <ac:picMk id="27" creationId="{822573AC-178E-6D03-8D34-8E9D4CFAE777}"/>
+          </ac:picMkLst>
+        </pc:picChg>
+        <pc:picChg chg="mod">
+          <ac:chgData name="Maurer, Marius" userId="73e198c0-4891-41c9-a475-1c219e411f9f" providerId="ADAL" clId="{B2A80625-E86A-4CEB-9035-CBD35C99A22C}" dt="2026-05-20T12:55:23.989" v="846" actId="1036"/>
+          <ac:picMkLst>
+            <pc:docMk/>
+            <pc:sldMk cId="332124325" sldId="256"/>
+            <ac:picMk id="44" creationId="{7536373E-70BC-78BF-1C68-E8EAED50BDAF}"/>
+          </ac:picMkLst>
+        </pc:picChg>
+        <pc:cxnChg chg="add mod">
+          <ac:chgData name="Maurer, Marius" userId="73e198c0-4891-41c9-a475-1c219e411f9f" providerId="ADAL" clId="{B2A80625-E86A-4CEB-9035-CBD35C99A22C}" dt="2026-05-20T12:57:14.089" v="1058" actId="1035"/>
+          <ac:cxnSpMkLst>
+            <pc:docMk/>
+            <pc:sldMk cId="332124325" sldId="256"/>
+            <ac:cxnSpMk id="4" creationId="{2A7A8C33-049D-573B-237C-AFADCB6DBB98}"/>
+          </ac:cxnSpMkLst>
+        </pc:cxnChg>
+        <pc:cxnChg chg="mod">
+          <ac:chgData name="Maurer, Marius" userId="73e198c0-4891-41c9-a475-1c219e411f9f" providerId="ADAL" clId="{B2A80625-E86A-4CEB-9035-CBD35C99A22C}" dt="2026-05-20T13:04:18.924" v="1426" actId="14100"/>
+          <ac:cxnSpMkLst>
+            <pc:docMk/>
+            <pc:sldMk cId="332124325" sldId="256"/>
+            <ac:cxnSpMk id="12" creationId="{D553CD21-7989-24CB-AEB5-B8279D1D1C68}"/>
+          </ac:cxnSpMkLst>
+        </pc:cxnChg>
+        <pc:cxnChg chg="add mod">
+          <ac:chgData name="Maurer, Marius" userId="73e198c0-4891-41c9-a475-1c219e411f9f" providerId="ADAL" clId="{B2A80625-E86A-4CEB-9035-CBD35C99A22C}" dt="2026-05-20T12:56:14.062" v="975" actId="1035"/>
+          <ac:cxnSpMkLst>
+            <pc:docMk/>
+            <pc:sldMk cId="332124325" sldId="256"/>
+            <ac:cxnSpMk id="17" creationId="{593A4930-C9E9-82AB-9C8E-32761C3BFA73}"/>
+          </ac:cxnSpMkLst>
+        </pc:cxnChg>
+        <pc:cxnChg chg="mod">
+          <ac:chgData name="Maurer, Marius" userId="73e198c0-4891-41c9-a475-1c219e411f9f" providerId="ADAL" clId="{B2A80625-E86A-4CEB-9035-CBD35C99A22C}" dt="2026-05-20T13:04:41.093" v="1434" actId="14100"/>
+          <ac:cxnSpMkLst>
+            <pc:docMk/>
+            <pc:sldMk cId="332124325" sldId="256"/>
+            <ac:cxnSpMk id="29" creationId="{B4745E57-698D-5C13-FD25-60E59121D220}"/>
+          </ac:cxnSpMkLst>
+        </pc:cxnChg>
+        <pc:cxnChg chg="add mod">
+          <ac:chgData name="Maurer, Marius" userId="73e198c0-4891-41c9-a475-1c219e411f9f" providerId="ADAL" clId="{B2A80625-E86A-4CEB-9035-CBD35C99A22C}" dt="2026-05-20T13:03:40.693" v="1404" actId="1037"/>
+          <ac:cxnSpMkLst>
+            <pc:docMk/>
+            <pc:sldMk cId="332124325" sldId="256"/>
+            <ac:cxnSpMk id="31" creationId="{75EBF94A-BA8B-A463-A8DB-8CDB9D3952FB}"/>
+          </ac:cxnSpMkLst>
+        </pc:cxnChg>
+        <pc:cxnChg chg="add mod">
+          <ac:chgData name="Maurer, Marius" userId="73e198c0-4891-41c9-a475-1c219e411f9f" providerId="ADAL" clId="{B2A80625-E86A-4CEB-9035-CBD35C99A22C}" dt="2026-05-20T13:03:52.693" v="1405"/>
+          <ac:cxnSpMkLst>
+            <pc:docMk/>
+            <pc:sldMk cId="332124325" sldId="256"/>
+            <ac:cxnSpMk id="32" creationId="{569C8CC1-CA09-7663-E6C5-E852D4C97A29}"/>
+          </ac:cxnSpMkLst>
+        </pc:cxnChg>
+        <pc:cxnChg chg="mod">
+          <ac:chgData name="Maurer, Marius" userId="73e198c0-4891-41c9-a475-1c219e411f9f" providerId="ADAL" clId="{B2A80625-E86A-4CEB-9035-CBD35C99A22C}" dt="2026-05-20T13:04:25.008" v="1429" actId="1038"/>
+          <ac:cxnSpMkLst>
+            <pc:docMk/>
+            <pc:sldMk cId="332124325" sldId="256"/>
+            <ac:cxnSpMk id="39" creationId="{A7AEA1AD-5F64-81A6-0778-181BA7081140}"/>
+          </ac:cxnSpMkLst>
+        </pc:cxnChg>
       </pc:sldChg>
     </pc:docChg>
   </pc:docChgLst>
@@ -242,7 +490,7 @@
           <a:p>
             <a:fld id="{61A61C3E-B578-482D-ADF4-0DD2B122CA35}" type="datetimeFigureOut">
               <a:rPr lang="de-DE" smtClean="0"/>
-              <a:t>19.05.2026</a:t>
+              <a:t>20.05.2026</a:t>
             </a:fld>
             <a:endParaRPr lang="de-DE"/>
           </a:p>
@@ -640,7 +888,7 @@
           <a:p>
             <a:fld id="{7A967564-6120-49BA-AFB2-40F93D1AEBD4}" type="datetimeFigureOut">
               <a:rPr lang="de-DE" smtClean="0"/>
-              <a:t>19.05.2026</a:t>
+              <a:t>20.05.2026</a:t>
             </a:fld>
             <a:endParaRPr lang="de-DE"/>
           </a:p>
@@ -810,7 +1058,7 @@
           <a:p>
             <a:fld id="{7A967564-6120-49BA-AFB2-40F93D1AEBD4}" type="datetimeFigureOut">
               <a:rPr lang="de-DE" smtClean="0"/>
-              <a:t>19.05.2026</a:t>
+              <a:t>20.05.2026</a:t>
             </a:fld>
             <a:endParaRPr lang="de-DE"/>
           </a:p>
@@ -990,7 +1238,7 @@
           <a:p>
             <a:fld id="{7A967564-6120-49BA-AFB2-40F93D1AEBD4}" type="datetimeFigureOut">
               <a:rPr lang="de-DE" smtClean="0"/>
-              <a:t>19.05.2026</a:t>
+              <a:t>20.05.2026</a:t>
             </a:fld>
             <a:endParaRPr lang="de-DE"/>
           </a:p>
@@ -1160,7 +1408,7 @@
           <a:p>
             <a:fld id="{7A967564-6120-49BA-AFB2-40F93D1AEBD4}" type="datetimeFigureOut">
               <a:rPr lang="de-DE" smtClean="0"/>
-              <a:t>19.05.2026</a:t>
+              <a:t>20.05.2026</a:t>
             </a:fld>
             <a:endParaRPr lang="de-DE"/>
           </a:p>
@@ -1406,7 +1654,7 @@
           <a:p>
             <a:fld id="{7A967564-6120-49BA-AFB2-40F93D1AEBD4}" type="datetimeFigureOut">
               <a:rPr lang="de-DE" smtClean="0"/>
-              <a:t>19.05.2026</a:t>
+              <a:t>20.05.2026</a:t>
             </a:fld>
             <a:endParaRPr lang="de-DE"/>
           </a:p>
@@ -1638,7 +1886,7 @@
           <a:p>
             <a:fld id="{7A967564-6120-49BA-AFB2-40F93D1AEBD4}" type="datetimeFigureOut">
               <a:rPr lang="de-DE" smtClean="0"/>
-              <a:t>19.05.2026</a:t>
+              <a:t>20.05.2026</a:t>
             </a:fld>
             <a:endParaRPr lang="de-DE"/>
           </a:p>
@@ -2005,7 +2253,7 @@
           <a:p>
             <a:fld id="{7A967564-6120-49BA-AFB2-40F93D1AEBD4}" type="datetimeFigureOut">
               <a:rPr lang="de-DE" smtClean="0"/>
-              <a:t>19.05.2026</a:t>
+              <a:t>20.05.2026</a:t>
             </a:fld>
             <a:endParaRPr lang="de-DE"/>
           </a:p>
@@ -2123,7 +2371,7 @@
           <a:p>
             <a:fld id="{7A967564-6120-49BA-AFB2-40F93D1AEBD4}" type="datetimeFigureOut">
               <a:rPr lang="de-DE" smtClean="0"/>
-              <a:t>19.05.2026</a:t>
+              <a:t>20.05.2026</a:t>
             </a:fld>
             <a:endParaRPr lang="de-DE"/>
           </a:p>
@@ -2218,7 +2466,7 @@
           <a:p>
             <a:fld id="{7A967564-6120-49BA-AFB2-40F93D1AEBD4}" type="datetimeFigureOut">
               <a:rPr lang="de-DE" smtClean="0"/>
-              <a:t>19.05.2026</a:t>
+              <a:t>20.05.2026</a:t>
             </a:fld>
             <a:endParaRPr lang="de-DE"/>
           </a:p>
@@ -2495,7 +2743,7 @@
           <a:p>
             <a:fld id="{7A967564-6120-49BA-AFB2-40F93D1AEBD4}" type="datetimeFigureOut">
               <a:rPr lang="de-DE" smtClean="0"/>
-              <a:t>19.05.2026</a:t>
+              <a:t>20.05.2026</a:t>
             </a:fld>
             <a:endParaRPr lang="de-DE"/>
           </a:p>
@@ -2752,7 +3000,7 @@
           <a:p>
             <a:fld id="{7A967564-6120-49BA-AFB2-40F93D1AEBD4}" type="datetimeFigureOut">
               <a:rPr lang="de-DE" smtClean="0"/>
-              <a:t>19.05.2026</a:t>
+              <a:t>20.05.2026</a:t>
             </a:fld>
             <a:endParaRPr lang="de-DE"/>
           </a:p>
@@ -2965,7 +3213,7 @@
           <a:p>
             <a:fld id="{7A967564-6120-49BA-AFB2-40F93D1AEBD4}" type="datetimeFigureOut">
               <a:rPr lang="de-DE" smtClean="0"/>
-              <a:t>19.05.2026</a:t>
+              <a:t>20.05.2026</a:t>
             </a:fld>
             <a:endParaRPr lang="de-DE"/>
           </a:p>
@@ -3428,6 +3676,37 @@
       </p:grpSpPr>
       <p:pic>
         <p:nvPicPr>
+          <p:cNvPr id="3" name="Grafik 2">
+            <a:extLst>
+              <a:ext uri="{FF2B5EF4-FFF2-40B4-BE49-F238E27FC236}">
+                <a16:creationId xmlns:a16="http://schemas.microsoft.com/office/drawing/2014/main" id="{1A99C2FA-F900-4667-35AC-3234A9BE34C7}"/>
+              </a:ext>
+            </a:extLst>
+          </p:cNvPr>
+          <p:cNvPicPr>
+            <a:picLocks noChangeAspect="1"/>
+          </p:cNvPicPr>
+          <p:nvPr/>
+        </p:nvPicPr>
+        <p:blipFill>
+          <a:blip r:embed="rId2"/>
+          <a:srcRect t="29676" b="35435"/>
+          <a:stretch>
+            <a:fillRect/>
+          </a:stretch>
+        </p:blipFill>
+        <p:spPr>
+          <a:xfrm>
+            <a:off x="11598330" y="12118931"/>
+            <a:ext cx="8370118" cy="5191711"/>
+          </a:xfrm>
+          <a:prstGeom prst="rect">
+            <a:avLst/>
+          </a:prstGeom>
+        </p:spPr>
+      </p:pic>
+      <p:pic>
+        <p:nvPicPr>
           <p:cNvPr id="5" name="Grafik 4" descr="Ein Bild, das Reihe, Diagramm, parallel enthält.&#10;&#10;KI-generierte Inhalte können fehlerhaft sein.">
             <a:extLst>
               <a:ext uri="{FF2B5EF4-FFF2-40B4-BE49-F238E27FC236}">
@@ -3441,7 +3720,7 @@
           <p:nvPr/>
         </p:nvPicPr>
         <p:blipFill>
-          <a:blip r:embed="rId2">
+          <a:blip r:embed="rId3">
             <a:extLst>
               <a:ext uri="{28A0092B-C50C-407E-A947-70E740481C1C}">
                 <a14:useLocalDpi xmlns:a14="http://schemas.microsoft.com/office/drawing/2010/main" val="0"/>
@@ -3455,7 +3734,7 @@
         </p:blipFill>
         <p:spPr>
           <a:xfrm>
-            <a:off x="411830" y="5685715"/>
+            <a:off x="10420248" y="21107552"/>
             <a:ext cx="3476096" cy="2178000"/>
           </a:xfrm>
           <a:prstGeom prst="rect">
@@ -3478,7 +3757,7 @@
           <p:nvPr/>
         </p:nvPicPr>
         <p:blipFill>
-          <a:blip r:embed="rId3">
+          <a:blip r:embed="rId4">
             <a:extLst>
               <a:ext uri="{28A0092B-C50C-407E-A947-70E740481C1C}">
                 <a14:useLocalDpi xmlns:a14="http://schemas.microsoft.com/office/drawing/2010/main" val="0"/>
@@ -3492,7 +3771,7 @@
         </p:blipFill>
         <p:spPr>
           <a:xfrm>
-            <a:off x="411829" y="7953250"/>
+            <a:off x="10420247" y="23375087"/>
             <a:ext cx="3476097" cy="2178000"/>
           </a:xfrm>
           <a:prstGeom prst="rect">
@@ -3515,7 +3794,7 @@
           <p:nvPr/>
         </p:nvPicPr>
         <p:blipFill>
-          <a:blip r:embed="rId4">
+          <a:blip r:embed="rId5">
             <a:extLst>
               <a:ext uri="{28A0092B-C50C-407E-A947-70E740481C1C}">
                 <a14:useLocalDpi xmlns:a14="http://schemas.microsoft.com/office/drawing/2010/main" val="0"/>
@@ -3529,7 +3808,7 @@
         </p:blipFill>
         <p:spPr>
           <a:xfrm>
-            <a:off x="411828" y="3067922"/>
+            <a:off x="10420246" y="18489759"/>
             <a:ext cx="3476098" cy="2527200"/>
           </a:xfrm>
           <a:prstGeom prst="rect">
@@ -3590,7 +3869,7 @@
         <p:spPr>
           <a:xfrm>
             <a:off x="10155514" y="1775104"/>
-            <a:ext cx="55278" cy="28879067"/>
+            <a:ext cx="62380" cy="28500109"/>
           </a:xfrm>
           <a:prstGeom prst="line">
             <a:avLst/>
@@ -3625,7 +3904,7 @@
         </p:nvSpPr>
         <p:spPr>
           <a:xfrm>
-            <a:off x="331691" y="1928452"/>
+            <a:off x="10340109" y="17350289"/>
             <a:ext cx="9614367" cy="1048877"/>
           </a:xfrm>
           <a:prstGeom prst="rect">
@@ -3660,7 +3939,7 @@
         </p:nvSpPr>
         <p:spPr>
           <a:xfrm>
-            <a:off x="3992654" y="3068276"/>
+            <a:off x="14001072" y="18490113"/>
             <a:ext cx="5953404" cy="2526846"/>
           </a:xfrm>
           <a:prstGeom prst="rect">
@@ -3725,7 +4004,7 @@
         </p:nvSpPr>
         <p:spPr>
           <a:xfrm>
-            <a:off x="3992654" y="5684657"/>
+            <a:off x="14001072" y="21106494"/>
             <a:ext cx="5953404" cy="2179058"/>
           </a:xfrm>
           <a:prstGeom prst="rect">
@@ -3790,7 +4069,7 @@
         </p:nvSpPr>
         <p:spPr>
           <a:xfrm>
-            <a:off x="3992654" y="7953250"/>
+            <a:off x="14001072" y="23375087"/>
             <a:ext cx="6162860" cy="2179058"/>
           </a:xfrm>
           <a:prstGeom prst="rect">
@@ -3855,7 +4134,7 @@
         </p:nvSpPr>
         <p:spPr>
           <a:xfrm>
-            <a:off x="3992654" y="10221843"/>
+            <a:off x="14001072" y="25643680"/>
             <a:ext cx="6162860" cy="1831271"/>
           </a:xfrm>
           <a:prstGeom prst="rect">
@@ -3921,11 +4200,11 @@
           <p:nvPr/>
         </p:nvPicPr>
         <p:blipFill>
-          <a:blip r:embed="rId5">
+          <a:blip r:embed="rId6">
             <a:extLst>
               <a:ext uri="{BEBA8EAE-BF5A-486C-A8C5-ECC9F3942E4B}">
                 <a14:imgProps xmlns:a14="http://schemas.microsoft.com/office/drawing/2010/main">
-                  <a14:imgLayer r:embed="rId6">
+                  <a14:imgLayer r:embed="rId7">
                     <a14:imgEffect>
                       <a14:artisticLightScreen/>
                     </a14:imgEffect>
@@ -3941,7 +4220,7 @@
         </p:blipFill>
         <p:spPr>
           <a:xfrm>
-            <a:off x="331691" y="10220785"/>
+            <a:off x="10340109" y="25642622"/>
             <a:ext cx="3556235" cy="1831271"/>
           </a:xfrm>
           <a:prstGeom prst="rect">
@@ -3958,13 +4237,15 @@
               </a:ext>
             </a:extLst>
           </p:cNvPr>
-          <p:cNvCxnSpPr/>
+          <p:cNvCxnSpPr>
+            <a:cxnSpLocks/>
+          </p:cNvCxnSpPr>
           <p:nvPr/>
         </p:nvCxnSpPr>
         <p:spPr>
           <a:xfrm>
-            <a:off x="-1" y="12042277"/>
-            <a:ext cx="10161343" cy="0"/>
+            <a:off x="-49876" y="12645394"/>
+            <a:ext cx="10233386" cy="0"/>
           </a:xfrm>
           <a:prstGeom prst="line">
             <a:avLst/>
@@ -4000,7 +4281,7 @@
           <p:nvPr/>
         </p:nvPicPr>
         <p:blipFill>
-          <a:blip r:embed="rId7">
+          <a:blip r:embed="rId8">
             <a:extLst>
               <a:ext uri="{28A0092B-C50C-407E-A947-70E740481C1C}">
                 <a14:useLocalDpi xmlns:a14="http://schemas.microsoft.com/office/drawing/2010/main" val="0"/>
@@ -4013,7 +4294,7 @@
         </p:blipFill>
         <p:spPr>
           <a:xfrm>
-            <a:off x="411828" y="12888584"/>
+            <a:off x="411828" y="13355511"/>
             <a:ext cx="9534230" cy="4848258"/>
           </a:xfrm>
           <a:prstGeom prst="rect">
@@ -4035,7 +4316,7 @@
         </p:nvSpPr>
         <p:spPr>
           <a:xfrm>
-            <a:off x="0" y="12131704"/>
+            <a:off x="0" y="12598631"/>
             <a:ext cx="9614367" cy="1048877"/>
           </a:xfrm>
           <a:prstGeom prst="rect">
@@ -4070,7 +4351,7 @@
         </p:nvSpPr>
         <p:spPr>
           <a:xfrm>
-            <a:off x="0" y="17978935"/>
+            <a:off x="0" y="18445862"/>
             <a:ext cx="9946059" cy="12264896"/>
           </a:xfrm>
           <a:prstGeom prst="rect">
@@ -4153,15 +4434,7 @@
             </a:pPr>
             <a:r>
               <a:rPr lang="de-DE" sz="2260" dirty="0"/>
-              <a:t>Man baut den schweren Vorderteil so um, dass er zentral im </a:t>
-            </a:r>
-            <a:r>
-              <a:rPr lang="de-DE" sz="2260"/>
-              <a:t>Fahrzeug sitzt, </a:t>
-            </a:r>
-            <a:r>
-              <a:rPr lang="de-DE" sz="2260" dirty="0"/>
-              <a:t>statt vorne herauszuragen</a:t>
+              <a:t>Man baut den schweren Vorderteil so um, dass er zentral im Fahrzeug sitzt, statt vorne herauszuragen</a:t>
             </a:r>
           </a:p>
           <a:p>
@@ -4319,9 +4592,6 @@
               <a:rPr lang="de-DE" sz="2260" dirty="0"/>
               <a:t>Man stützt den schweren Vorderteil einfach ab, statt ihn umzubauen</a:t>
             </a:r>
-          </a:p>
-          <a:p>
-            <a:endParaRPr lang="de-DE" sz="2260" dirty="0"/>
           </a:p>
           <a:p>
             <a:endParaRPr lang="de-DE" sz="2260" dirty="0"/>
@@ -4477,7 +4747,7 @@
             </a:r>
             <a:r>
               <a:rPr lang="de-DE" sz="2260" dirty="0"/>
-              <a:t> werden dringend benötigte Ressourcen frei</a:t>
+              <a:t> werden dringend benötigte Ressourcen freigegeben</a:t>
             </a:r>
           </a:p>
         </p:txBody>
@@ -4516,13 +4786,9 @@
             </a:r>
           </a:p>
           <a:p>
-            <a:pPr marL="342900" indent="-342900">
-              <a:buFont typeface="Arial" panose="020B0604020202020204" pitchFamily="34" charset="0"/>
-              <a:buChar char="•"/>
-            </a:pPr>
-            <a:r>
-              <a:rPr lang="de-DE" sz="2260" dirty="0"/>
-              <a:t>In Ubuntu Server werden keine GPIO Libraries automatisch mitgeliefert, folglich verwenden wir die modernere Architektur</a:t>
+            <a:r>
+              <a:rPr lang="de-DE" sz="2260" dirty="0"/>
+              <a:t>In Ubuntu Server werden keine GPIO Libraries automatisch mitgeliefert, folglich wird eine modernere Architektur verwendet  </a:t>
             </a:r>
           </a:p>
           <a:p>
@@ -4732,23 +4998,7 @@
           <a:p>
             <a:r>
               <a:rPr lang="de-DE" sz="3108" dirty="0"/>
-              <a:t>Verbesserte Systemarchitektur, Reproduzierbares Setup </a:t>
-            </a:r>
-            <a:r>
-              <a:rPr lang="de-DE" sz="3108"/>
-              <a:t>und </a:t>
-            </a:r>
-            <a:r>
-              <a:rPr lang="de-DE" sz="3108" dirty="0"/>
-              <a:t>M</a:t>
-            </a:r>
-            <a:r>
-              <a:rPr lang="de-DE" sz="3108"/>
-              <a:t>odernisierung </a:t>
-            </a:r>
-            <a:r>
-              <a:rPr lang="de-DE" sz="3108" dirty="0"/>
-              <a:t>der Technik</a:t>
+              <a:t>Verbesserte Systemarchitektur, Reproduzierbares Setup und Modernisierung der Technik</a:t>
             </a:r>
           </a:p>
         </p:txBody>
@@ -4807,7 +5057,7 @@
         </p:nvCxnSpPr>
         <p:spPr>
           <a:xfrm>
-            <a:off x="10155514" y="12052056"/>
+            <a:off x="10172140" y="12041895"/>
             <a:ext cx="11200472" cy="0"/>
           </a:xfrm>
           <a:prstGeom prst="line">
@@ -4829,6 +5079,492 @@
           </a:fontRef>
         </p:style>
       </p:cxnSp>
+      <p:cxnSp>
+        <p:nvCxnSpPr>
+          <p:cNvPr id="4" name="Gerader Verbinder 3">
+            <a:extLst>
+              <a:ext uri="{FF2B5EF4-FFF2-40B4-BE49-F238E27FC236}">
+                <a16:creationId xmlns:a16="http://schemas.microsoft.com/office/drawing/2014/main" id="{2A7A8C33-049D-573B-237C-AFADCB6DBB98}"/>
+              </a:ext>
+            </a:extLst>
+          </p:cNvPr>
+          <p:cNvCxnSpPr>
+            <a:cxnSpLocks/>
+          </p:cNvCxnSpPr>
+          <p:nvPr/>
+        </p:nvCxnSpPr>
+        <p:spPr>
+          <a:xfrm>
+            <a:off x="10184344" y="17082485"/>
+            <a:ext cx="11200472" cy="0"/>
+          </a:xfrm>
+          <a:prstGeom prst="line">
+            <a:avLst/>
+          </a:prstGeom>
+        </p:spPr>
+        <p:style>
+          <a:lnRef idx="2">
+            <a:schemeClr val="accent1"/>
+          </a:lnRef>
+          <a:fillRef idx="0">
+            <a:schemeClr val="accent1"/>
+          </a:fillRef>
+          <a:effectRef idx="1">
+            <a:schemeClr val="accent1"/>
+          </a:effectRef>
+          <a:fontRef idx="minor">
+            <a:schemeClr val="tx1"/>
+          </a:fontRef>
+        </p:style>
+      </p:cxnSp>
+      <p:sp>
+        <p:nvSpPr>
+          <p:cNvPr id="8" name="Textfeld 7">
+            <a:extLst>
+              <a:ext uri="{FF2B5EF4-FFF2-40B4-BE49-F238E27FC236}">
+                <a16:creationId xmlns:a16="http://schemas.microsoft.com/office/drawing/2014/main" id="{7054B9CF-28EC-B7AF-93FA-6A8E664F6A27}"/>
+              </a:ext>
+            </a:extLst>
+          </p:cNvPr>
+          <p:cNvSpPr txBox="1"/>
+          <p:nvPr/>
+        </p:nvSpPr>
+        <p:spPr>
+          <a:xfrm>
+            <a:off x="171138" y="1928451"/>
+            <a:ext cx="9855059" cy="570926"/>
+          </a:xfrm>
+          <a:prstGeom prst="rect">
+            <a:avLst/>
+          </a:prstGeom>
+          <a:noFill/>
+        </p:spPr>
+        <p:txBody>
+          <a:bodyPr wrap="square" rtlCol="0">
+            <a:spAutoFit/>
+          </a:bodyPr>
+          <a:lstStyle/>
+          <a:p>
+            <a:r>
+              <a:rPr lang="de-DE" sz="3110" dirty="0"/>
+              <a:t>Kurz und Knapp</a:t>
+            </a:r>
+          </a:p>
+        </p:txBody>
+      </p:sp>
+      <p:sp>
+        <p:nvSpPr>
+          <p:cNvPr id="10" name="Textfeld 9">
+            <a:extLst>
+              <a:ext uri="{FF2B5EF4-FFF2-40B4-BE49-F238E27FC236}">
+                <a16:creationId xmlns:a16="http://schemas.microsoft.com/office/drawing/2014/main" id="{801A9B5C-99C7-1C82-552E-1A587087C116}"/>
+              </a:ext>
+            </a:extLst>
+          </p:cNvPr>
+          <p:cNvSpPr txBox="1"/>
+          <p:nvPr/>
+        </p:nvSpPr>
+        <p:spPr>
+          <a:xfrm>
+            <a:off x="189872" y="2652723"/>
+            <a:ext cx="9756186" cy="1831271"/>
+          </a:xfrm>
+          <a:prstGeom prst="rect">
+            <a:avLst/>
+          </a:prstGeom>
+          <a:noFill/>
+        </p:spPr>
+        <p:txBody>
+          <a:bodyPr wrap="square" rtlCol="0">
+            <a:spAutoFit/>
+          </a:bodyPr>
+          <a:lstStyle/>
+          <a:p>
+            <a:r>
+              <a:rPr lang="de-DE" sz="2260" dirty="0"/>
+              <a:t>Das Projekt befasst sich mit der Automation eines Modellautos. Dieses Modellauto soll mit Hilfe von Sensoren Gegenständen ausweichen. </a:t>
+            </a:r>
+          </a:p>
+          <a:p>
+            <a:endParaRPr lang="de-DE" sz="2260" dirty="0"/>
+          </a:p>
+          <a:p>
+            <a:r>
+              <a:rPr lang="de-DE" sz="2260" dirty="0"/>
+              <a:t>Die Steuerung des Autos ist über W-LAN möglich und Erfolg auf einem Handy mit Android oder IOS-Betriebssystem. </a:t>
+            </a:r>
+          </a:p>
+        </p:txBody>
+      </p:sp>
+      <p:cxnSp>
+        <p:nvCxnSpPr>
+          <p:cNvPr id="17" name="Gerader Verbinder 16">
+            <a:extLst>
+              <a:ext uri="{FF2B5EF4-FFF2-40B4-BE49-F238E27FC236}">
+                <a16:creationId xmlns:a16="http://schemas.microsoft.com/office/drawing/2014/main" id="{593A4930-C9E9-82AB-9C8E-32761C3BFA73}"/>
+              </a:ext>
+            </a:extLst>
+          </p:cNvPr>
+          <p:cNvCxnSpPr/>
+          <p:nvPr/>
+        </p:nvCxnSpPr>
+        <p:spPr>
+          <a:xfrm>
+            <a:off x="-5829" y="4834906"/>
+            <a:ext cx="10161343" cy="0"/>
+          </a:xfrm>
+          <a:prstGeom prst="line">
+            <a:avLst/>
+          </a:prstGeom>
+        </p:spPr>
+        <p:style>
+          <a:lnRef idx="2">
+            <a:schemeClr val="accent1"/>
+          </a:lnRef>
+          <a:fillRef idx="0">
+            <a:schemeClr val="accent1"/>
+          </a:fillRef>
+          <a:effectRef idx="1">
+            <a:schemeClr val="accent1"/>
+          </a:effectRef>
+          <a:fontRef idx="minor">
+            <a:schemeClr val="tx1"/>
+          </a:fontRef>
+        </p:style>
+      </p:cxnSp>
+      <p:sp>
+        <p:nvSpPr>
+          <p:cNvPr id="19" name="Textfeld 18">
+            <a:extLst>
+              <a:ext uri="{FF2B5EF4-FFF2-40B4-BE49-F238E27FC236}">
+                <a16:creationId xmlns:a16="http://schemas.microsoft.com/office/drawing/2014/main" id="{07CDD146-FA05-911F-C7F2-8CD0264BAAF5}"/>
+              </a:ext>
+            </a:extLst>
+          </p:cNvPr>
+          <p:cNvSpPr txBox="1"/>
+          <p:nvPr/>
+        </p:nvSpPr>
+        <p:spPr>
+          <a:xfrm>
+            <a:off x="195727" y="5042151"/>
+            <a:ext cx="9855059" cy="570926"/>
+          </a:xfrm>
+          <a:prstGeom prst="rect">
+            <a:avLst/>
+          </a:prstGeom>
+          <a:noFill/>
+        </p:spPr>
+        <p:txBody>
+          <a:bodyPr wrap="square" rtlCol="0">
+            <a:spAutoFit/>
+          </a:bodyPr>
+          <a:lstStyle/>
+          <a:p>
+            <a:r>
+              <a:rPr lang="de-DE" sz="3110" dirty="0"/>
+              <a:t>Probleme</a:t>
+            </a:r>
+          </a:p>
+        </p:txBody>
+      </p:sp>
+      <p:sp>
+        <p:nvSpPr>
+          <p:cNvPr id="20" name="Textfeld 19">
+            <a:extLst>
+              <a:ext uri="{FF2B5EF4-FFF2-40B4-BE49-F238E27FC236}">
+                <a16:creationId xmlns:a16="http://schemas.microsoft.com/office/drawing/2014/main" id="{81FAA57B-3CFA-CA3C-60E5-E182BE3915AD}"/>
+              </a:ext>
+            </a:extLst>
+          </p:cNvPr>
+          <p:cNvSpPr txBox="1"/>
+          <p:nvPr/>
+        </p:nvSpPr>
+        <p:spPr>
+          <a:xfrm>
+            <a:off x="214461" y="5766423"/>
+            <a:ext cx="9756186" cy="6352508"/>
+          </a:xfrm>
+          <a:prstGeom prst="rect">
+            <a:avLst/>
+          </a:prstGeom>
+          <a:noFill/>
+        </p:spPr>
+        <p:txBody>
+          <a:bodyPr wrap="square" rtlCol="0">
+            <a:spAutoFit/>
+          </a:bodyPr>
+          <a:lstStyle/>
+          <a:p>
+            <a:r>
+              <a:rPr lang="de-DE" sz="2260" dirty="0"/>
+              <a:t>Das Auto hat in der Elektronik, Mechanik und Software Probleme, welche im </a:t>
+            </a:r>
+            <a:r>
+              <a:rPr lang="de-DE" sz="2260" dirty="0" err="1"/>
+              <a:t>Verlaufder</a:t>
+            </a:r>
+            <a:r>
+              <a:rPr lang="de-DE" sz="2260" dirty="0"/>
+              <a:t> Weiterentwicklung behoben werden müssen.</a:t>
+            </a:r>
+          </a:p>
+          <a:p>
+            <a:endParaRPr lang="de-DE" sz="2260" dirty="0"/>
+          </a:p>
+          <a:p>
+            <a:pPr marL="285750" indent="-285750">
+              <a:buFont typeface="Arial" panose="020B0604020202020204" pitchFamily="34" charset="0"/>
+              <a:buChar char="•"/>
+            </a:pPr>
+            <a:r>
+              <a:rPr lang="de-DE" sz="2260" dirty="0"/>
+              <a:t>Elektronik:</a:t>
+            </a:r>
+          </a:p>
+          <a:p>
+            <a:pPr marL="742950" lvl="1" indent="-285750">
+              <a:buFont typeface="Arial" panose="020B0604020202020204" pitchFamily="34" charset="0"/>
+              <a:buChar char="•"/>
+            </a:pPr>
+            <a:r>
+              <a:rPr lang="de-DE" sz="2260" dirty="0"/>
+              <a:t>kein Verdrahtungsplan</a:t>
+            </a:r>
+          </a:p>
+          <a:p>
+            <a:pPr marL="742950" lvl="1" indent="-285750">
+              <a:buFont typeface="Arial" panose="020B0604020202020204" pitchFamily="34" charset="0"/>
+              <a:buChar char="•"/>
+            </a:pPr>
+            <a:r>
+              <a:rPr lang="de-DE" sz="2260" dirty="0"/>
+              <a:t>abgebrochen Kabel</a:t>
+            </a:r>
+          </a:p>
+          <a:p>
+            <a:pPr marL="742950" lvl="1" indent="-285750">
+              <a:buFont typeface="Arial" panose="020B0604020202020204" pitchFamily="34" charset="0"/>
+              <a:buChar char="•"/>
+            </a:pPr>
+            <a:r>
+              <a:rPr lang="de-DE" sz="2260" dirty="0"/>
+              <a:t>Kabel die ins nichts führen</a:t>
+            </a:r>
+          </a:p>
+          <a:p>
+            <a:pPr marL="742950" lvl="1" indent="-285750">
+              <a:buFont typeface="Arial" panose="020B0604020202020204" pitchFamily="34" charset="0"/>
+              <a:buChar char="•"/>
+            </a:pPr>
+            <a:r>
+              <a:rPr lang="de-DE" sz="2260" dirty="0"/>
+              <a:t>kurze Akkulaufzeit</a:t>
+            </a:r>
+          </a:p>
+          <a:p>
+            <a:pPr marL="285750" indent="-285750">
+              <a:buFont typeface="Arial" panose="020B0604020202020204" pitchFamily="34" charset="0"/>
+              <a:buChar char="•"/>
+            </a:pPr>
+            <a:endParaRPr lang="de-DE" sz="2260" dirty="0"/>
+          </a:p>
+          <a:p>
+            <a:pPr marL="285750" indent="-285750">
+              <a:buFont typeface="Arial" panose="020B0604020202020204" pitchFamily="34" charset="0"/>
+              <a:buChar char="•"/>
+            </a:pPr>
+            <a:r>
+              <a:rPr lang="de-DE" sz="2260" dirty="0"/>
+              <a:t>Mechanik:</a:t>
+            </a:r>
+          </a:p>
+          <a:p>
+            <a:pPr marL="742950" lvl="1" indent="-285750">
+              <a:buFont typeface="Arial" panose="020B0604020202020204" pitchFamily="34" charset="0"/>
+              <a:buChar char="•"/>
+            </a:pPr>
+            <a:r>
+              <a:rPr lang="de-DE" sz="2260" dirty="0"/>
+              <a:t>Frontalneigung um 7° wegen zu schwerem Vorbau</a:t>
+            </a:r>
+          </a:p>
+          <a:p>
+            <a:pPr marL="742950" lvl="1" indent="-285750">
+              <a:buFont typeface="Arial" panose="020B0604020202020204" pitchFamily="34" charset="0"/>
+              <a:buChar char="•"/>
+            </a:pPr>
+            <a:r>
+              <a:rPr lang="de-DE" sz="2260" dirty="0"/>
+              <a:t>kompaktes und schlecht wartbares Design</a:t>
+            </a:r>
+          </a:p>
+          <a:p>
+            <a:pPr marL="742950" lvl="1" indent="-285750">
+              <a:buFont typeface="Arial" panose="020B0604020202020204" pitchFamily="34" charset="0"/>
+              <a:buChar char="•"/>
+            </a:pPr>
+            <a:r>
+              <a:rPr lang="de-DE" sz="2260" dirty="0"/>
+              <a:t>fehlende/kaputte Halterungen für Sensoren</a:t>
+            </a:r>
+          </a:p>
+          <a:p>
+            <a:pPr marL="285750" indent="-285750">
+              <a:buFont typeface="Arial" panose="020B0604020202020204" pitchFamily="34" charset="0"/>
+              <a:buChar char="•"/>
+            </a:pPr>
+            <a:endParaRPr lang="de-DE" sz="2260" dirty="0"/>
+          </a:p>
+          <a:p>
+            <a:pPr marL="285750" indent="-285750">
+              <a:buFont typeface="Arial" panose="020B0604020202020204" pitchFamily="34" charset="0"/>
+              <a:buChar char="•"/>
+            </a:pPr>
+            <a:r>
+              <a:rPr lang="de-DE" sz="2260" dirty="0"/>
+              <a:t>Software:</a:t>
+            </a:r>
+          </a:p>
+          <a:p>
+            <a:pPr marL="742950" lvl="1" indent="-285750">
+              <a:buFont typeface="Arial" panose="020B0604020202020204" pitchFamily="34" charset="0"/>
+              <a:buChar char="•"/>
+            </a:pPr>
+            <a:r>
+              <a:rPr lang="de-DE" sz="2260" dirty="0"/>
+              <a:t>benötigt große Speicherkapazität</a:t>
+            </a:r>
+          </a:p>
+          <a:p>
+            <a:pPr marL="742950" lvl="1" indent="-285750">
+              <a:buFont typeface="Arial" panose="020B0604020202020204" pitchFamily="34" charset="0"/>
+              <a:buChar char="•"/>
+            </a:pPr>
+            <a:r>
+              <a:rPr lang="de-DE" sz="2260" dirty="0"/>
+              <a:t>hohe Arbeitsspeichernutzung</a:t>
+            </a:r>
+          </a:p>
+          <a:p>
+            <a:pPr marL="742950" lvl="1" indent="-285750">
+              <a:buFont typeface="Arial" panose="020B0604020202020204" pitchFamily="34" charset="0"/>
+              <a:buChar char="•"/>
+            </a:pPr>
+            <a:r>
+              <a:rPr lang="de-DE" sz="2260" dirty="0"/>
+              <a:t>unzureichende Dokumentation Künstliche Intelligenz (KI)</a:t>
+            </a:r>
+          </a:p>
+        </p:txBody>
+      </p:sp>
+      <p:sp>
+        <p:nvSpPr>
+          <p:cNvPr id="30" name="Textfeld 29">
+            <a:extLst>
+              <a:ext uri="{FF2B5EF4-FFF2-40B4-BE49-F238E27FC236}">
+                <a16:creationId xmlns:a16="http://schemas.microsoft.com/office/drawing/2014/main" id="{D621C955-9D7E-6371-7B4B-D393D8713C7E}"/>
+              </a:ext>
+            </a:extLst>
+          </p:cNvPr>
+          <p:cNvSpPr txBox="1"/>
+          <p:nvPr/>
+        </p:nvSpPr>
+        <p:spPr>
+          <a:xfrm>
+            <a:off x="10420246" y="27660600"/>
+            <a:ext cx="10797545" cy="1135696"/>
+          </a:xfrm>
+          <a:prstGeom prst="rect">
+            <a:avLst/>
+          </a:prstGeom>
+          <a:noFill/>
+        </p:spPr>
+        <p:txBody>
+          <a:bodyPr wrap="square" rtlCol="0">
+            <a:spAutoFit/>
+          </a:bodyPr>
+          <a:lstStyle/>
+          <a:p>
+            <a:r>
+              <a:rPr lang="de-DE" sz="2260" dirty="0"/>
+              <a:t>Anhand der berechneten Kurve kann durch die Ableitung der Kurve der Lenkungswinkel der Vorderräder berechnet werden. Hierbei ist wichtig den maximalen Lenkungswinkel nicht zu überschreiten.</a:t>
+            </a:r>
+          </a:p>
+        </p:txBody>
+      </p:sp>
+      <p:cxnSp>
+        <p:nvCxnSpPr>
+          <p:cNvPr id="31" name="Gerader Verbinder 30">
+            <a:extLst>
+              <a:ext uri="{FF2B5EF4-FFF2-40B4-BE49-F238E27FC236}">
+                <a16:creationId xmlns:a16="http://schemas.microsoft.com/office/drawing/2014/main" id="{75EBF94A-BA8B-A463-A8DB-8CDB9D3952FB}"/>
+              </a:ext>
+            </a:extLst>
+          </p:cNvPr>
+          <p:cNvCxnSpPr>
+            <a:cxnSpLocks/>
+          </p:cNvCxnSpPr>
+          <p:nvPr/>
+        </p:nvCxnSpPr>
+        <p:spPr>
+          <a:xfrm>
+            <a:off x="10217895" y="28802045"/>
+            <a:ext cx="11200472" cy="0"/>
+          </a:xfrm>
+          <a:prstGeom prst="line">
+            <a:avLst/>
+          </a:prstGeom>
+        </p:spPr>
+        <p:style>
+          <a:lnRef idx="2">
+            <a:schemeClr val="accent1"/>
+          </a:lnRef>
+          <a:fillRef idx="0">
+            <a:schemeClr val="accent1"/>
+          </a:fillRef>
+          <a:effectRef idx="1">
+            <a:schemeClr val="accent1"/>
+          </a:effectRef>
+          <a:fontRef idx="minor">
+            <a:schemeClr val="tx1"/>
+          </a:fontRef>
+        </p:style>
+      </p:cxnSp>
+      <p:sp>
+        <p:nvSpPr>
+          <p:cNvPr id="33" name="Textfeld 32">
+            <a:extLst>
+              <a:ext uri="{FF2B5EF4-FFF2-40B4-BE49-F238E27FC236}">
+                <a16:creationId xmlns:a16="http://schemas.microsoft.com/office/drawing/2014/main" id="{22CAC9EC-4426-86E6-AA5F-1B3058572100}"/>
+              </a:ext>
+            </a:extLst>
+          </p:cNvPr>
+          <p:cNvSpPr txBox="1"/>
+          <p:nvPr/>
+        </p:nvSpPr>
+        <p:spPr>
+          <a:xfrm>
+            <a:off x="10340109" y="28956043"/>
+            <a:ext cx="10797545" cy="787908"/>
+          </a:xfrm>
+          <a:prstGeom prst="rect">
+            <a:avLst/>
+          </a:prstGeom>
+          <a:noFill/>
+        </p:spPr>
+        <p:txBody>
+          <a:bodyPr wrap="square" rtlCol="0">
+            <a:spAutoFit/>
+          </a:bodyPr>
+          <a:lstStyle/>
+          <a:p>
+            <a:r>
+              <a:rPr lang="de-DE" sz="2260" dirty="0"/>
+              <a:t>Studiengang Informatik in den Fachbereichen Informationstechnik und Künstliche Intelligenz</a:t>
+            </a:r>
+          </a:p>
+        </p:txBody>
+      </p:sp>
     </p:spTree>
     <p:extLst>
       <p:ext uri="{BB962C8B-B14F-4D97-AF65-F5344CB8AC3E}">

--- a/doc/Technikforum/Plakat_Forum.pptx
+++ b/doc/Technikforum/Plakat_Forum.pptx
@@ -118,7 +118,7 @@
 <file path=ppt/revisionInfo.xml><?xml version="1.0" encoding="utf-8"?>
 <p1510:revInfo xmlns:a="http://schemas.openxmlformats.org/drawingml/2006/main" xmlns:r="http://schemas.openxmlformats.org/officeDocument/2006/relationships" xmlns:p1510="http://schemas.microsoft.com/office/powerpoint/2015/10/main">
   <p1510:revLst>
-    <p1510:client id="{974C6F5C-8394-499A-B74A-2887A4D69D20}" v="19" dt="2026-05-20T13:04:01.743"/>
+    <p1510:client id="{974C6F5C-8394-499A-B74A-2887A4D69D20}" v="27" dt="2026-05-20T13:23:06.125"/>
   </p1510:revLst>
 </p1510:revInfo>
 </file>
@@ -128,12 +128,12 @@
   <pc:docChgLst>
     <pc:chgData name="Maurer, Marius" userId="73e198c0-4891-41c9-a475-1c219e411f9f" providerId="ADAL" clId="{B2A80625-E86A-4CEB-9035-CBD35C99A22C}"/>
     <pc:docChg chg="undo redo custSel modSld">
-      <pc:chgData name="Maurer, Marius" userId="73e198c0-4891-41c9-a475-1c219e411f9f" providerId="ADAL" clId="{B2A80625-E86A-4CEB-9035-CBD35C99A22C}" dt="2026-05-20T13:06:02.175" v="1536" actId="313"/>
+      <pc:chgData name="Maurer, Marius" userId="73e198c0-4891-41c9-a475-1c219e411f9f" providerId="ADAL" clId="{B2A80625-E86A-4CEB-9035-CBD35C99A22C}" dt="2026-05-20T13:25:36.702" v="1941" actId="20577"/>
       <pc:docMkLst>
         <pc:docMk/>
       </pc:docMkLst>
       <pc:sldChg chg="addSp delSp modSp mod">
-        <pc:chgData name="Maurer, Marius" userId="73e198c0-4891-41c9-a475-1c219e411f9f" providerId="ADAL" clId="{B2A80625-E86A-4CEB-9035-CBD35C99A22C}" dt="2026-05-20T13:06:02.175" v="1536" actId="313"/>
+        <pc:chgData name="Maurer, Marius" userId="73e198c0-4891-41c9-a475-1c219e411f9f" providerId="ADAL" clId="{B2A80625-E86A-4CEB-9035-CBD35C99A22C}" dt="2026-05-20T13:25:36.702" v="1941" actId="20577"/>
         <pc:sldMkLst>
           <pc:docMk/>
           <pc:sldMk cId="332124325" sldId="256"/>
@@ -179,7 +179,7 @@
           </ac:spMkLst>
         </pc:spChg>
         <pc:spChg chg="mod">
-          <ac:chgData name="Maurer, Marius" userId="73e198c0-4891-41c9-a475-1c219e411f9f" providerId="ADAL" clId="{B2A80625-E86A-4CEB-9035-CBD35C99A22C}" dt="2026-05-20T12:57:14.089" v="1058" actId="1035"/>
+          <ac:chgData name="Maurer, Marius" userId="73e198c0-4891-41c9-a475-1c219e411f9f" providerId="ADAL" clId="{B2A80625-E86A-4CEB-9035-CBD35C99A22C}" dt="2026-05-20T13:22:02.505" v="1603" actId="1036"/>
           <ac:spMkLst>
             <pc:docMk/>
             <pc:sldMk cId="332124325" sldId="256"/>
@@ -195,7 +195,7 @@
           </ac:spMkLst>
         </pc:spChg>
         <pc:spChg chg="add mod">
-          <ac:chgData name="Maurer, Marius" userId="73e198c0-4891-41c9-a475-1c219e411f9f" providerId="ADAL" clId="{B2A80625-E86A-4CEB-9035-CBD35C99A22C}" dt="2026-05-20T12:56:14.062" v="975" actId="1035"/>
+          <ac:chgData name="Maurer, Marius" userId="73e198c0-4891-41c9-a475-1c219e411f9f" providerId="ADAL" clId="{B2A80625-E86A-4CEB-9035-CBD35C99A22C}" dt="2026-05-20T13:18:33.148" v="1551" actId="6549"/>
           <ac:spMkLst>
             <pc:docMk/>
             <pc:sldMk cId="332124325" sldId="256"/>
@@ -203,7 +203,7 @@
           </ac:spMkLst>
         </pc:spChg>
         <pc:spChg chg="mod">
-          <ac:chgData name="Maurer, Marius" userId="73e198c0-4891-41c9-a475-1c219e411f9f" providerId="ADAL" clId="{B2A80625-E86A-4CEB-9035-CBD35C99A22C}" dt="2026-05-20T12:57:14.089" v="1058" actId="1035"/>
+          <ac:chgData name="Maurer, Marius" userId="73e198c0-4891-41c9-a475-1c219e411f9f" providerId="ADAL" clId="{B2A80625-E86A-4CEB-9035-CBD35C99A22C}" dt="2026-05-20T13:22:02.505" v="1603" actId="1036"/>
           <ac:spMkLst>
             <pc:docMk/>
             <pc:sldMk cId="332124325" sldId="256"/>
@@ -211,7 +211,7 @@
           </ac:spMkLst>
         </pc:spChg>
         <pc:spChg chg="mod">
-          <ac:chgData name="Maurer, Marius" userId="73e198c0-4891-41c9-a475-1c219e411f9f" providerId="ADAL" clId="{B2A80625-E86A-4CEB-9035-CBD35C99A22C}" dt="2026-05-20T12:57:14.089" v="1058" actId="1035"/>
+          <ac:chgData name="Maurer, Marius" userId="73e198c0-4891-41c9-a475-1c219e411f9f" providerId="ADAL" clId="{B2A80625-E86A-4CEB-9035-CBD35C99A22C}" dt="2026-05-20T13:22:02.505" v="1603" actId="1036"/>
           <ac:spMkLst>
             <pc:docMk/>
             <pc:sldMk cId="332124325" sldId="256"/>
@@ -219,7 +219,7 @@
           </ac:spMkLst>
         </pc:spChg>
         <pc:spChg chg="mod">
-          <ac:chgData name="Maurer, Marius" userId="73e198c0-4891-41c9-a475-1c219e411f9f" providerId="ADAL" clId="{B2A80625-E86A-4CEB-9035-CBD35C99A22C}" dt="2026-05-20T12:57:14.089" v="1058" actId="1035"/>
+          <ac:chgData name="Maurer, Marius" userId="73e198c0-4891-41c9-a475-1c219e411f9f" providerId="ADAL" clId="{B2A80625-E86A-4CEB-9035-CBD35C99A22C}" dt="2026-05-20T13:22:02.505" v="1603" actId="1036"/>
           <ac:spMkLst>
             <pc:docMk/>
             <pc:sldMk cId="332124325" sldId="256"/>
@@ -227,7 +227,7 @@
           </ac:spMkLst>
         </pc:spChg>
         <pc:spChg chg="mod">
-          <ac:chgData name="Maurer, Marius" userId="73e198c0-4891-41c9-a475-1c219e411f9f" providerId="ADAL" clId="{B2A80625-E86A-4CEB-9035-CBD35C99A22C}" dt="2026-05-20T12:57:14.089" v="1058" actId="1035"/>
+          <ac:chgData name="Maurer, Marius" userId="73e198c0-4891-41c9-a475-1c219e411f9f" providerId="ADAL" clId="{B2A80625-E86A-4CEB-9035-CBD35C99A22C}" dt="2026-05-20T13:22:02.505" v="1603" actId="1036"/>
           <ac:spMkLst>
             <pc:docMk/>
             <pc:sldMk cId="332124325" sldId="256"/>
@@ -251,7 +251,7 @@
           </ac:spMkLst>
         </pc:spChg>
         <pc:spChg chg="add mod">
-          <ac:chgData name="Maurer, Marius" userId="73e198c0-4891-41c9-a475-1c219e411f9f" providerId="ADAL" clId="{B2A80625-E86A-4CEB-9035-CBD35C99A22C}" dt="2026-05-20T12:59:13.775" v="1319" actId="255"/>
+          <ac:chgData name="Maurer, Marius" userId="73e198c0-4891-41c9-a475-1c219e411f9f" providerId="ADAL" clId="{B2A80625-E86A-4CEB-9035-CBD35C99A22C}" dt="2026-05-20T13:22:02.505" v="1603" actId="1036"/>
           <ac:spMkLst>
             <pc:docMk/>
             <pc:sldMk cId="332124325" sldId="256"/>
@@ -259,11 +259,43 @@
           </ac:spMkLst>
         </pc:spChg>
         <pc:spChg chg="add mod">
-          <ac:chgData name="Maurer, Marius" userId="73e198c0-4891-41c9-a475-1c219e411f9f" providerId="ADAL" clId="{B2A80625-E86A-4CEB-9035-CBD35C99A22C}" dt="2026-05-20T13:06:02.175" v="1536" actId="313"/>
+          <ac:chgData name="Maurer, Marius" userId="73e198c0-4891-41c9-a475-1c219e411f9f" providerId="ADAL" clId="{B2A80625-E86A-4CEB-9035-CBD35C99A22C}" dt="2026-05-20T13:22:02.505" v="1603" actId="1036"/>
           <ac:spMkLst>
             <pc:docMk/>
             <pc:sldMk cId="332124325" sldId="256"/>
             <ac:spMk id="33" creationId="{22CAC9EC-4426-86E6-AA5F-1B3058572100}"/>
+          </ac:spMkLst>
+        </pc:spChg>
+        <pc:spChg chg="add">
+          <ac:chgData name="Maurer, Marius" userId="73e198c0-4891-41c9-a475-1c219e411f9f" providerId="ADAL" clId="{B2A80625-E86A-4CEB-9035-CBD35C99A22C}" dt="2026-05-20T13:17:52.062" v="1540"/>
+          <ac:spMkLst>
+            <pc:docMk/>
+            <pc:sldMk cId="332124325" sldId="256"/>
+            <ac:spMk id="36" creationId="{3F3D7512-1DB5-587F-B68E-6B34C6E2D0AA}"/>
+          </ac:spMkLst>
+        </pc:spChg>
+        <pc:spChg chg="add">
+          <ac:chgData name="Maurer, Marius" userId="73e198c0-4891-41c9-a475-1c219e411f9f" providerId="ADAL" clId="{B2A80625-E86A-4CEB-9035-CBD35C99A22C}" dt="2026-05-20T13:19:55.523" v="1570"/>
+          <ac:spMkLst>
+            <pc:docMk/>
+            <pc:sldMk cId="332124325" sldId="256"/>
+            <ac:spMk id="40" creationId="{36373DC0-5FC4-445A-D64B-B5C3F5425CDE}"/>
+          </ac:spMkLst>
+        </pc:spChg>
+        <pc:spChg chg="add mod">
+          <ac:chgData name="Maurer, Marius" userId="73e198c0-4891-41c9-a475-1c219e411f9f" providerId="ADAL" clId="{B2A80625-E86A-4CEB-9035-CBD35C99A22C}" dt="2026-05-20T13:22:59.254" v="1628" actId="20577"/>
+          <ac:spMkLst>
+            <pc:docMk/>
+            <pc:sldMk cId="332124325" sldId="256"/>
+            <ac:spMk id="42" creationId="{626029D7-CB6C-1AD8-FCAB-27DAB17BC0B2}"/>
+          </ac:spMkLst>
+        </pc:spChg>
+        <pc:spChg chg="add mod">
+          <ac:chgData name="Maurer, Marius" userId="73e198c0-4891-41c9-a475-1c219e411f9f" providerId="ADAL" clId="{B2A80625-E86A-4CEB-9035-CBD35C99A22C}" dt="2026-05-20T13:25:36.702" v="1941" actId="20577"/>
+          <ac:spMkLst>
+            <pc:docMk/>
+            <pc:sldMk cId="332124325" sldId="256"/>
+            <ac:spMk id="43" creationId="{5BF47525-5F99-2C58-B7B4-7694730A563B}"/>
           </ac:spMkLst>
         </pc:spChg>
         <pc:spChg chg="mod">
@@ -291,7 +323,7 @@
           </ac:spMkLst>
         </pc:spChg>
         <pc:picChg chg="add mod ord modCrop">
-          <ac:chgData name="Maurer, Marius" userId="73e198c0-4891-41c9-a475-1c219e411f9f" providerId="ADAL" clId="{B2A80625-E86A-4CEB-9035-CBD35C99A22C}" dt="2026-05-20T12:56:57.431" v="1023" actId="1076"/>
+          <ac:chgData name="Maurer, Marius" userId="73e198c0-4891-41c9-a475-1c219e411f9f" providerId="ADAL" clId="{B2A80625-E86A-4CEB-9035-CBD35C99A22C}" dt="2026-05-20T13:18:52.445" v="1566" actId="1037"/>
           <ac:picMkLst>
             <pc:docMk/>
             <pc:sldMk cId="332124325" sldId="256"/>
@@ -299,7 +331,7 @@
           </ac:picMkLst>
         </pc:picChg>
         <pc:picChg chg="mod">
-          <ac:chgData name="Maurer, Marius" userId="73e198c0-4891-41c9-a475-1c219e411f9f" providerId="ADAL" clId="{B2A80625-E86A-4CEB-9035-CBD35C99A22C}" dt="2026-05-20T12:57:14.089" v="1058" actId="1035"/>
+          <ac:chgData name="Maurer, Marius" userId="73e198c0-4891-41c9-a475-1c219e411f9f" providerId="ADAL" clId="{B2A80625-E86A-4CEB-9035-CBD35C99A22C}" dt="2026-05-20T13:22:02.505" v="1603" actId="1036"/>
           <ac:picMkLst>
             <pc:docMk/>
             <pc:sldMk cId="332124325" sldId="256"/>
@@ -307,7 +339,7 @@
           </ac:picMkLst>
         </pc:picChg>
         <pc:picChg chg="mod">
-          <ac:chgData name="Maurer, Marius" userId="73e198c0-4891-41c9-a475-1c219e411f9f" providerId="ADAL" clId="{B2A80625-E86A-4CEB-9035-CBD35C99A22C}" dt="2026-05-20T12:57:14.089" v="1058" actId="1035"/>
+          <ac:chgData name="Maurer, Marius" userId="73e198c0-4891-41c9-a475-1c219e411f9f" providerId="ADAL" clId="{B2A80625-E86A-4CEB-9035-CBD35C99A22C}" dt="2026-05-20T13:22:02.505" v="1603" actId="1036"/>
           <ac:picMkLst>
             <pc:docMk/>
             <pc:sldMk cId="332124325" sldId="256"/>
@@ -315,7 +347,7 @@
           </ac:picMkLst>
         </pc:picChg>
         <pc:picChg chg="mod">
-          <ac:chgData name="Maurer, Marius" userId="73e198c0-4891-41c9-a475-1c219e411f9f" providerId="ADAL" clId="{B2A80625-E86A-4CEB-9035-CBD35C99A22C}" dt="2026-05-20T12:57:14.089" v="1058" actId="1035"/>
+          <ac:chgData name="Maurer, Marius" userId="73e198c0-4891-41c9-a475-1c219e411f9f" providerId="ADAL" clId="{B2A80625-E86A-4CEB-9035-CBD35C99A22C}" dt="2026-05-20T13:22:02.505" v="1603" actId="1036"/>
           <ac:picMkLst>
             <pc:docMk/>
             <pc:sldMk cId="332124325" sldId="256"/>
@@ -336,6 +368,22 @@
             <pc:docMk/>
             <pc:sldMk cId="332124325" sldId="256"/>
             <ac:picMk id="27" creationId="{822573AC-178E-6D03-8D34-8E9D4CFAE777}"/>
+          </ac:picMkLst>
+        </pc:picChg>
+        <pc:picChg chg="add mod">
+          <ac:chgData name="Maurer, Marius" userId="73e198c0-4891-41c9-a475-1c219e411f9f" providerId="ADAL" clId="{B2A80625-E86A-4CEB-9035-CBD35C99A22C}" dt="2026-05-20T13:25:24.095" v="1938" actId="1076"/>
+          <ac:picMkLst>
+            <pc:docMk/>
+            <pc:sldMk cId="332124325" sldId="256"/>
+            <ac:picMk id="38" creationId="{74CFA65C-03A9-0830-55FE-D9225A14B4F7}"/>
+          </ac:picMkLst>
+        </pc:picChg>
+        <pc:picChg chg="add mod">
+          <ac:chgData name="Maurer, Marius" userId="73e198c0-4891-41c9-a475-1c219e411f9f" providerId="ADAL" clId="{B2A80625-E86A-4CEB-9035-CBD35C99A22C}" dt="2026-05-20T13:25:11.451" v="1929" actId="1038"/>
+          <ac:picMkLst>
+            <pc:docMk/>
+            <pc:sldMk cId="332124325" sldId="256"/>
+            <ac:picMk id="41" creationId="{31E99089-7FD7-4D0D-A7A2-F044052F2130}"/>
           </ac:picMkLst>
         </pc:picChg>
         <pc:picChg chg="mod">
@@ -3697,8 +3745,8 @@
         </p:blipFill>
         <p:spPr>
           <a:xfrm>
-            <a:off x="11598330" y="12118931"/>
-            <a:ext cx="8370118" cy="5191711"/>
+            <a:off x="3863370" y="6613042"/>
+            <a:ext cx="6655210" cy="4128010"/>
           </a:xfrm>
           <a:prstGeom prst="rect">
             <a:avLst/>
@@ -3734,7 +3782,7 @@
         </p:blipFill>
         <p:spPr>
           <a:xfrm>
-            <a:off x="10420248" y="21107552"/>
+            <a:off x="10420248" y="21691208"/>
             <a:ext cx="3476096" cy="2178000"/>
           </a:xfrm>
           <a:prstGeom prst="rect">
@@ -3771,7 +3819,7 @@
         </p:blipFill>
         <p:spPr>
           <a:xfrm>
-            <a:off x="10420247" y="23375087"/>
+            <a:off x="10420247" y="23958743"/>
             <a:ext cx="3476097" cy="2178000"/>
           </a:xfrm>
           <a:prstGeom prst="rect">
@@ -3808,7 +3856,7 @@
         </p:blipFill>
         <p:spPr>
           <a:xfrm>
-            <a:off x="10420246" y="18489759"/>
+            <a:off x="10420246" y="19073415"/>
             <a:ext cx="3476098" cy="2527200"/>
           </a:xfrm>
           <a:prstGeom prst="rect">
@@ -3904,8 +3952,8 @@
         </p:nvSpPr>
         <p:spPr>
           <a:xfrm>
-            <a:off x="10340109" y="17350289"/>
-            <a:ext cx="9614367" cy="1048877"/>
+            <a:off x="10340109" y="17933945"/>
+            <a:ext cx="10853644" cy="1048877"/>
           </a:xfrm>
           <a:prstGeom prst="rect">
             <a:avLst/>
@@ -3939,7 +3987,7 @@
         </p:nvSpPr>
         <p:spPr>
           <a:xfrm>
-            <a:off x="14001072" y="18490113"/>
+            <a:off x="14001072" y="19073769"/>
             <a:ext cx="5953404" cy="2526846"/>
           </a:xfrm>
           <a:prstGeom prst="rect">
@@ -4004,7 +4052,7 @@
         </p:nvSpPr>
         <p:spPr>
           <a:xfrm>
-            <a:off x="14001072" y="21106494"/>
+            <a:off x="14001072" y="21690150"/>
             <a:ext cx="5953404" cy="2179058"/>
           </a:xfrm>
           <a:prstGeom prst="rect">
@@ -4069,7 +4117,7 @@
         </p:nvSpPr>
         <p:spPr>
           <a:xfrm>
-            <a:off x="14001072" y="23375087"/>
+            <a:off x="14001072" y="23958743"/>
             <a:ext cx="6162860" cy="2179058"/>
           </a:xfrm>
           <a:prstGeom prst="rect">
@@ -4134,7 +4182,7 @@
         </p:nvSpPr>
         <p:spPr>
           <a:xfrm>
-            <a:off x="14001072" y="25643680"/>
+            <a:off x="14001072" y="26227336"/>
             <a:ext cx="6162860" cy="1831271"/>
           </a:xfrm>
           <a:prstGeom prst="rect">
@@ -4220,7 +4268,7 @@
         </p:blipFill>
         <p:spPr>
           <a:xfrm>
-            <a:off x="10340109" y="25642622"/>
+            <a:off x="10340109" y="26226278"/>
             <a:ext cx="3556235" cy="1831271"/>
           </a:xfrm>
           <a:prstGeom prst="rect">
@@ -5095,7 +5143,7 @@
         </p:nvCxnSpPr>
         <p:spPr>
           <a:xfrm>
-            <a:off x="10184344" y="17082485"/>
+            <a:off x="10184344" y="17666141"/>
             <a:ext cx="11200472" cy="0"/>
           </a:xfrm>
           <a:prstGeom prst="line">
@@ -5282,7 +5330,7 @@
         <p:spPr>
           <a:xfrm>
             <a:off x="214461" y="5766423"/>
-            <a:ext cx="9756186" cy="6352508"/>
+            <a:ext cx="9756186" cy="6700296"/>
           </a:xfrm>
           <a:prstGeom prst="rect">
             <a:avLst/>
@@ -5385,7 +5433,14 @@
             </a:pPr>
             <a:r>
               <a:rPr lang="de-DE" sz="2260" dirty="0"/>
-              <a:t>Frontalneigung um 7° wegen zu schwerem Vorbau</a:t>
+              <a:t>Frontalneigung um 7° wegen</a:t>
+            </a:r>
+            <a:br>
+              <a:rPr lang="de-DE" sz="2260" dirty="0"/>
+            </a:br>
+            <a:r>
+              <a:rPr lang="de-DE" sz="2260" dirty="0"/>
+              <a:t>zu schwerem Vorbau</a:t>
             </a:r>
           </a:p>
           <a:p>
@@ -5471,7 +5526,7 @@
         </p:nvSpPr>
         <p:spPr>
           <a:xfrm>
-            <a:off x="10420246" y="27660600"/>
+            <a:off x="10420246" y="28244256"/>
             <a:ext cx="10797545" cy="1135696"/>
           </a:xfrm>
           <a:prstGeom prst="rect">
@@ -5508,7 +5563,7 @@
         </p:nvCxnSpPr>
         <p:spPr>
           <a:xfrm>
-            <a:off x="10217895" y="28802045"/>
+            <a:off x="10217895" y="29385701"/>
             <a:ext cx="11200472" cy="0"/>
           </a:xfrm>
           <a:prstGeom prst="line">
@@ -5544,7 +5599,7 @@
         </p:nvSpPr>
         <p:spPr>
           <a:xfrm>
-            <a:off x="10340109" y="28956043"/>
+            <a:off x="10340109" y="29539699"/>
             <a:ext cx="10797545" cy="787908"/>
           </a:xfrm>
           <a:prstGeom prst="rect">
@@ -5561,6 +5616,136 @@
             <a:r>
               <a:rPr lang="de-DE" sz="2260" dirty="0"/>
               <a:t>Studiengang Informatik in den Fachbereichen Informationstechnik und Künstliche Intelligenz</a:t>
+            </a:r>
+          </a:p>
+        </p:txBody>
+      </p:sp>
+      <p:pic>
+        <p:nvPicPr>
+          <p:cNvPr id="38" name="Grafik 37">
+            <a:extLst>
+              <a:ext uri="{FF2B5EF4-FFF2-40B4-BE49-F238E27FC236}">
+                <a16:creationId xmlns:a16="http://schemas.microsoft.com/office/drawing/2014/main" id="{74CFA65C-03A9-0830-55FE-D9225A14B4F7}"/>
+              </a:ext>
+            </a:extLst>
+          </p:cNvPr>
+          <p:cNvPicPr>
+            <a:picLocks noChangeAspect="1"/>
+          </p:cNvPicPr>
+          <p:nvPr/>
+        </p:nvPicPr>
+        <p:blipFill>
+          <a:blip r:embed="rId9"/>
+          <a:stretch>
+            <a:fillRect/>
+          </a:stretch>
+        </p:blipFill>
+        <p:spPr>
+          <a:xfrm>
+            <a:off x="10518580" y="14273939"/>
+            <a:ext cx="7158812" cy="3187909"/>
+          </a:xfrm>
+          <a:prstGeom prst="rect">
+            <a:avLst/>
+          </a:prstGeom>
+        </p:spPr>
+      </p:pic>
+      <p:pic>
+        <p:nvPicPr>
+          <p:cNvPr id="41" name="Grafik 40">
+            <a:extLst>
+              <a:ext uri="{FF2B5EF4-FFF2-40B4-BE49-F238E27FC236}">
+                <a16:creationId xmlns:a16="http://schemas.microsoft.com/office/drawing/2014/main" id="{31E99089-7FD7-4D0D-A7A2-F044052F2130}"/>
+              </a:ext>
+            </a:extLst>
+          </p:cNvPr>
+          <p:cNvPicPr>
+            <a:picLocks noChangeAspect="1"/>
+          </p:cNvPicPr>
+          <p:nvPr/>
+        </p:nvPicPr>
+        <p:blipFill>
+          <a:blip r:embed="rId10"/>
+          <a:stretch>
+            <a:fillRect/>
+          </a:stretch>
+        </p:blipFill>
+        <p:spPr>
+          <a:xfrm>
+            <a:off x="17789119" y="12194857"/>
+            <a:ext cx="3383430" cy="5285635"/>
+          </a:xfrm>
+          <a:prstGeom prst="rect">
+            <a:avLst/>
+          </a:prstGeom>
+        </p:spPr>
+      </p:pic>
+      <p:sp>
+        <p:nvSpPr>
+          <p:cNvPr id="42" name="Textfeld 41">
+            <a:extLst>
+              <a:ext uri="{FF2B5EF4-FFF2-40B4-BE49-F238E27FC236}">
+                <a16:creationId xmlns:a16="http://schemas.microsoft.com/office/drawing/2014/main" id="{626029D7-CB6C-1AD8-FCAB-27DAB17BC0B2}"/>
+              </a:ext>
+            </a:extLst>
+          </p:cNvPr>
+          <p:cNvSpPr txBox="1"/>
+          <p:nvPr/>
+        </p:nvSpPr>
+        <p:spPr>
+          <a:xfrm>
+            <a:off x="10420246" y="12194856"/>
+            <a:ext cx="7024351" cy="570926"/>
+          </a:xfrm>
+          <a:prstGeom prst="rect">
+            <a:avLst/>
+          </a:prstGeom>
+          <a:noFill/>
+        </p:spPr>
+        <p:txBody>
+          <a:bodyPr wrap="square" rtlCol="0">
+            <a:spAutoFit/>
+          </a:bodyPr>
+          <a:lstStyle/>
+          <a:p>
+            <a:r>
+              <a:rPr lang="de-DE" sz="3110" dirty="0"/>
+              <a:t>Bedienung per Handy</a:t>
+            </a:r>
+          </a:p>
+        </p:txBody>
+      </p:sp>
+      <p:sp>
+        <p:nvSpPr>
+          <p:cNvPr id="43" name="Textfeld 42">
+            <a:extLst>
+              <a:ext uri="{FF2B5EF4-FFF2-40B4-BE49-F238E27FC236}">
+                <a16:creationId xmlns:a16="http://schemas.microsoft.com/office/drawing/2014/main" id="{5BF47525-5F99-2C58-B7B4-7694730A563B}"/>
+              </a:ext>
+            </a:extLst>
+          </p:cNvPr>
+          <p:cNvSpPr txBox="1"/>
+          <p:nvPr/>
+        </p:nvSpPr>
+        <p:spPr>
+          <a:xfrm>
+            <a:off x="10442693" y="12771813"/>
+            <a:ext cx="7432731" cy="1483483"/>
+          </a:xfrm>
+          <a:prstGeom prst="rect">
+            <a:avLst/>
+          </a:prstGeom>
+          <a:noFill/>
+        </p:spPr>
+        <p:txBody>
+          <a:bodyPr wrap="square" rtlCol="0">
+            <a:spAutoFit/>
+          </a:bodyPr>
+          <a:lstStyle/>
+          <a:p>
+            <a:r>
+              <a:rPr lang="de-DE" sz="2260" dirty="0"/>
+              <a:t>Die Steuerung funktioniert über eine übersichtlich strukturierte Handy App. Die Steuerung ist über Joysticks oder Neigung des Handys möglich. Für die Zukunft können mehrere Fahrzeuge in der App hinterlegt werden.</a:t>
             </a:r>
           </a:p>
         </p:txBody>
